--- a/src/math/Hakoniwa-time.pptx
+++ b/src/math/Hakoniwa-time.pptx
@@ -6,7 +6,7 @@
     <p:sldMasterId id="2147483815" r:id="rId2"/>
   </p:sldMasterIdLst>
   <p:notesMasterIdLst>
-    <p:notesMasterId r:id="rId19"/>
+    <p:notesMasterId r:id="rId21"/>
   </p:notesMasterIdLst>
   <p:sldIdLst>
     <p:sldId id="256" r:id="rId3"/>
@@ -21,10 +21,12 @@
     <p:sldId id="1351" r:id="rId12"/>
     <p:sldId id="1357" r:id="rId13"/>
     <p:sldId id="1359" r:id="rId14"/>
-    <p:sldId id="1355" r:id="rId15"/>
-    <p:sldId id="1350" r:id="rId16"/>
-    <p:sldId id="1358" r:id="rId17"/>
-    <p:sldId id="1356" r:id="rId18"/>
+    <p:sldId id="1360" r:id="rId15"/>
+    <p:sldId id="1361" r:id="rId16"/>
+    <p:sldId id="1355" r:id="rId17"/>
+    <p:sldId id="1350" r:id="rId18"/>
+    <p:sldId id="1358" r:id="rId19"/>
+    <p:sldId id="1356" r:id="rId20"/>
   </p:sldIdLst>
   <p:sldSz cx="12192000" cy="6858000"/>
   <p:notesSz cx="6797675" cy="9926638"/>
@@ -305,7 +307,7 @@
               <a:pPr>
                 <a:defRPr/>
               </a:pPr>
-              <a:t>2026/2/25</a:t>
+              <a:t>2026/3/3</a:t>
             </a:fld>
             <a:endParaRPr lang="ja-JP" altLang="en-US" dirty="0"/>
           </a:p>
@@ -990,7 +992,7 @@
           <a:p>
             <a:fld id="{1733E518-4B2E-46CC-A779-D7A67A1295D7}" type="datetimeFigureOut">
               <a:rPr kumimoji="1" lang="ja-JP" altLang="en-US" smtClean="0"/>
-              <a:t>2026/2/25</a:t>
+              <a:t>2026/3/3</a:t>
             </a:fld>
             <a:endParaRPr kumimoji="1" lang="ja-JP" altLang="en-US"/>
           </a:p>
@@ -1190,7 +1192,7 @@
           <a:p>
             <a:fld id="{1733E518-4B2E-46CC-A779-D7A67A1295D7}" type="datetimeFigureOut">
               <a:rPr kumimoji="1" lang="ja-JP" altLang="en-US" smtClean="0"/>
-              <a:t>2026/2/25</a:t>
+              <a:t>2026/3/3</a:t>
             </a:fld>
             <a:endParaRPr kumimoji="1" lang="ja-JP" altLang="en-US"/>
           </a:p>
@@ -1400,7 +1402,7 @@
           <a:p>
             <a:fld id="{1733E518-4B2E-46CC-A779-D7A67A1295D7}" type="datetimeFigureOut">
               <a:rPr kumimoji="1" lang="ja-JP" altLang="en-US" smtClean="0"/>
-              <a:t>2026/2/25</a:t>
+              <a:t>2026/3/3</a:t>
             </a:fld>
             <a:endParaRPr kumimoji="1" lang="ja-JP" altLang="en-US"/>
           </a:p>
@@ -3804,7 +3806,7 @@
           <a:p>
             <a:fld id="{1733E518-4B2E-46CC-A779-D7A67A1295D7}" type="datetimeFigureOut">
               <a:rPr kumimoji="1" lang="ja-JP" altLang="en-US" smtClean="0"/>
-              <a:t>2026/2/25</a:t>
+              <a:t>2026/3/3</a:t>
             </a:fld>
             <a:endParaRPr kumimoji="1" lang="ja-JP" altLang="en-US"/>
           </a:p>
@@ -5291,7 +5293,7 @@
           <a:p>
             <a:fld id="{1733E518-4B2E-46CC-A779-D7A67A1295D7}" type="datetimeFigureOut">
               <a:rPr kumimoji="1" lang="ja-JP" altLang="en-US" smtClean="0"/>
-              <a:t>2026/2/25</a:t>
+              <a:t>2026/3/3</a:t>
             </a:fld>
             <a:endParaRPr kumimoji="1" lang="ja-JP" altLang="en-US"/>
           </a:p>
@@ -5640,7 +5642,7 @@
           <a:p>
             <a:fld id="{1733E518-4B2E-46CC-A779-D7A67A1295D7}" type="datetimeFigureOut">
               <a:rPr kumimoji="1" lang="ja-JP" altLang="en-US" smtClean="0"/>
-              <a:t>2026/2/25</a:t>
+              <a:t>2026/3/3</a:t>
             </a:fld>
             <a:endParaRPr kumimoji="1" lang="ja-JP" altLang="en-US"/>
           </a:p>
@@ -6123,7 +6125,7 @@
           <a:p>
             <a:fld id="{1733E518-4B2E-46CC-A779-D7A67A1295D7}" type="datetimeFigureOut">
               <a:rPr kumimoji="1" lang="ja-JP" altLang="en-US" smtClean="0"/>
-              <a:t>2026/2/25</a:t>
+              <a:t>2026/3/3</a:t>
             </a:fld>
             <a:endParaRPr kumimoji="1" lang="ja-JP" altLang="en-US"/>
           </a:p>
@@ -6240,7 +6242,7 @@
           <a:p>
             <a:fld id="{1733E518-4B2E-46CC-A779-D7A67A1295D7}" type="datetimeFigureOut">
               <a:rPr kumimoji="1" lang="ja-JP" altLang="en-US" smtClean="0"/>
-              <a:t>2026/2/25</a:t>
+              <a:t>2026/3/3</a:t>
             </a:fld>
             <a:endParaRPr kumimoji="1" lang="ja-JP" altLang="en-US"/>
           </a:p>
@@ -6335,7 +6337,7 @@
           <a:p>
             <a:fld id="{1733E518-4B2E-46CC-A779-D7A67A1295D7}" type="datetimeFigureOut">
               <a:rPr kumimoji="1" lang="ja-JP" altLang="en-US" smtClean="0"/>
-              <a:t>2026/2/25</a:t>
+              <a:t>2026/3/3</a:t>
             </a:fld>
             <a:endParaRPr kumimoji="1" lang="ja-JP" altLang="en-US"/>
           </a:p>
@@ -6642,7 +6644,7 @@
           <a:p>
             <a:fld id="{1733E518-4B2E-46CC-A779-D7A67A1295D7}" type="datetimeFigureOut">
               <a:rPr kumimoji="1" lang="ja-JP" altLang="en-US" smtClean="0"/>
-              <a:t>2026/2/25</a:t>
+              <a:t>2026/3/3</a:t>
             </a:fld>
             <a:endParaRPr kumimoji="1" lang="ja-JP" altLang="en-US"/>
           </a:p>
@@ -6894,7 +6896,7 @@
           <a:p>
             <a:fld id="{1733E518-4B2E-46CC-A779-D7A67A1295D7}" type="datetimeFigureOut">
               <a:rPr kumimoji="1" lang="ja-JP" altLang="en-US" smtClean="0"/>
-              <a:t>2026/2/25</a:t>
+              <a:t>2026/3/3</a:t>
             </a:fld>
             <a:endParaRPr kumimoji="1" lang="ja-JP" altLang="en-US"/>
           </a:p>
@@ -7137,7 +7139,7 @@
           <a:p>
             <a:fld id="{1733E518-4B2E-46CC-A779-D7A67A1295D7}" type="datetimeFigureOut">
               <a:rPr kumimoji="1" lang="ja-JP" altLang="en-US" smtClean="0"/>
-              <a:t>2026/2/25</a:t>
+              <a:t>2026/3/3</a:t>
             </a:fld>
             <a:endParaRPr kumimoji="1" lang="ja-JP" altLang="en-US"/>
           </a:p>
@@ -8349,7 +8351,7 @@
             <a:pPr algn="r"/>
             <a:r>
               <a:rPr lang="en-US" altLang="ja-JP"/>
-              <a:t>2024/9/26</a:t>
+              <a:t>2025/3/3</a:t>
             </a:r>
             <a:endParaRPr kumimoji="1" lang="en-US" altLang="ja-JP" dirty="0"/>
           </a:p>
@@ -11961,6 +11963,1856 @@
   <p:cSld>
     <p:spTree>
       <p:nvGrpSpPr>
+        <p:cNvPr id="1" name=""/>
+        <p:cNvGrpSpPr/>
+        <p:nvPr/>
+      </p:nvGrpSpPr>
+      <p:grpSpPr>
+        <a:xfrm>
+          <a:off x="0" y="0"/>
+          <a:ext cx="0" cy="0"/>
+          <a:chOff x="0" y="0"/>
+          <a:chExt cx="0" cy="0"/>
+        </a:xfrm>
+      </p:grpSpPr>
+      <p:sp>
+        <p:nvSpPr>
+          <p:cNvPr id="2" name="タイトル 1">
+            <a:extLst>
+              <a:ext uri="{FF2B5EF4-FFF2-40B4-BE49-F238E27FC236}">
+                <a16:creationId xmlns:a16="http://schemas.microsoft.com/office/drawing/2014/main" id="{2314CD3A-970C-7630-75FF-E9D0B0B56B6C}"/>
+              </a:ext>
+            </a:extLst>
+          </p:cNvPr>
+          <p:cNvSpPr>
+            <a:spLocks noGrp="1"/>
+          </p:cNvSpPr>
+          <p:nvPr>
+            <p:ph type="title"/>
+          </p:nvPr>
+        </p:nvSpPr>
+        <p:spPr/>
+        <p:txBody>
+          <a:bodyPr/>
+          <a:lstStyle/>
+          <a:p>
+            <a:r>
+              <a:rPr lang="ja-JP" altLang="en-US"/>
+              <a:t>進行性保証（デッドロックが起きない）</a:t>
+            </a:r>
+            <a:endParaRPr kumimoji="1" lang="ja-JP" altLang="en-US"/>
+          </a:p>
+        </p:txBody>
+      </p:sp>
+      <p:sp>
+        <p:nvSpPr>
+          <p:cNvPr id="3" name="コンテンツ プレースホルダー 2">
+            <a:extLst>
+              <a:ext uri="{FF2B5EF4-FFF2-40B4-BE49-F238E27FC236}">
+                <a16:creationId xmlns:a16="http://schemas.microsoft.com/office/drawing/2014/main" id="{80D3F7A2-1640-F8E7-1E97-1F174142D08B}"/>
+              </a:ext>
+            </a:extLst>
+          </p:cNvPr>
+          <p:cNvSpPr>
+            <a:spLocks noGrp="1"/>
+          </p:cNvSpPr>
+          <p:nvPr>
+            <p:ph idx="1"/>
+          </p:nvPr>
+        </p:nvSpPr>
+        <p:spPr/>
+        <p:txBody>
+          <a:bodyPr/>
+          <a:lstStyle/>
+          <a:p>
+            <a:r>
+              <a:rPr lang="ja-JP" altLang="en-US" sz="2400"/>
+              <a:t>大前提</a:t>
+            </a:r>
+            <a:r>
+              <a:rPr lang="en-US" altLang="ja-JP" sz="2400"/>
+              <a:t>(</a:t>
+            </a:r>
+            <a:r>
+              <a:rPr lang="ja-JP" altLang="en-US" sz="2400"/>
+              <a:t>基本的要請</a:t>
+            </a:r>
+            <a:r>
+              <a:rPr lang="en-US" altLang="ja-JP" sz="2400"/>
+              <a:t>)</a:t>
+            </a:r>
+          </a:p>
+          <a:p>
+            <a:pPr lvl="1"/>
+            <a:endParaRPr lang="en-US" altLang="ja-JP" sz="2000"/>
+          </a:p>
+          <a:p>
+            <a:endParaRPr kumimoji="1" lang="en-US" altLang="ja-JP" sz="2400"/>
+          </a:p>
+          <a:p>
+            <a:r>
+              <a:rPr kumimoji="1" lang="ja-JP" altLang="en-US" sz="2400"/>
+              <a:t>一般進行条件</a:t>
+            </a:r>
+            <a:r>
+              <a:rPr kumimoji="1" lang="en-US" altLang="ja-JP" sz="2400"/>
+              <a:t>(</a:t>
+            </a:r>
+            <a:r>
+              <a:rPr kumimoji="1" lang="ja-JP" altLang="en-US" sz="2400"/>
+              <a:t>最も強力な十分条件</a:t>
+            </a:r>
+            <a:r>
+              <a:rPr kumimoji="1" lang="en-US" altLang="ja-JP" sz="2400"/>
+              <a:t>)</a:t>
+            </a:r>
+          </a:p>
+          <a:p>
+            <a:pPr lvl="1"/>
+            <a:endParaRPr kumimoji="1" lang="en-US" altLang="ja-JP" sz="2000"/>
+          </a:p>
+          <a:p>
+            <a:endParaRPr lang="en-US" altLang="ja-JP" sz="2400"/>
+          </a:p>
+          <a:p>
+            <a:r>
+              <a:rPr lang="ja-JP" altLang="en-US" sz="2400"/>
+              <a:t>割り切れる条件</a:t>
+            </a:r>
+            <a:r>
+              <a:rPr lang="en-US" altLang="ja-JP" sz="2400"/>
+              <a:t>(</a:t>
+            </a:r>
+            <a:r>
+              <a:rPr lang="ja-JP" altLang="en-US" sz="2400"/>
+              <a:t>特別な十分条件</a:t>
+            </a:r>
+            <a:r>
+              <a:rPr lang="en-US" altLang="ja-JP" sz="2400"/>
+              <a:t>)</a:t>
+            </a:r>
+            <a:endParaRPr kumimoji="1" lang="en-US" altLang="ja-JP" sz="2400"/>
+          </a:p>
+          <a:p>
+            <a:pPr lvl="1"/>
+            <a:r>
+              <a:rPr kumimoji="1" lang="ja-JP" altLang="en-US" sz="2000"/>
+              <a:t>一般進行性条件が満たされない場合の「救済策」</a:t>
+            </a:r>
+          </a:p>
+        </p:txBody>
+      </p:sp>
+      <p:sp>
+        <p:nvSpPr>
+          <p:cNvPr id="4" name="スライド番号プレースホルダー 3">
+            <a:extLst>
+              <a:ext uri="{FF2B5EF4-FFF2-40B4-BE49-F238E27FC236}">
+                <a16:creationId xmlns:a16="http://schemas.microsoft.com/office/drawing/2014/main" id="{10832AA9-F3ED-6ED4-D37F-036737E2D4FF}"/>
+              </a:ext>
+            </a:extLst>
+          </p:cNvPr>
+          <p:cNvSpPr>
+            <a:spLocks noGrp="1"/>
+          </p:cNvSpPr>
+          <p:nvPr>
+            <p:ph type="sldNum" sz="quarter" idx="4"/>
+          </p:nvPr>
+        </p:nvSpPr>
+        <p:spPr/>
+        <p:txBody>
+          <a:bodyPr/>
+          <a:lstStyle/>
+          <a:p>
+            <a:pPr algn="r">
+              <a:defRPr/>
+            </a:pPr>
+            <a:fld id="{E17FD244-5B26-4792-B537-EF0BE56E30E9}" type="slidenum">
+              <a:rPr lang="ja-JP" altLang="en-US" sz="2800" smtClean="0">
+                <a:latin typeface="Meiryo UI" panose="020B0604030504040204" pitchFamily="34" charset="-128"/>
+                <a:ea typeface="Meiryo UI" panose="020B0604030504040204" pitchFamily="34" charset="-128"/>
+              </a:rPr>
+              <a:pPr algn="r">
+                <a:defRPr/>
+              </a:pPr>
+              <a:t>13</a:t>
+            </a:fld>
+            <a:endParaRPr lang="ja-JP" altLang="en-US" sz="2800" dirty="0">
+              <a:latin typeface="Meiryo UI" panose="020B0604030504040204" pitchFamily="34" charset="-128"/>
+              <a:ea typeface="Meiryo UI" panose="020B0604030504040204" pitchFamily="34" charset="-128"/>
+            </a:endParaRPr>
+          </a:p>
+        </p:txBody>
+      </p:sp>
+      <p:pic>
+        <p:nvPicPr>
+          <p:cNvPr id="5" name="図 4">
+            <a:extLst>
+              <a:ext uri="{FF2B5EF4-FFF2-40B4-BE49-F238E27FC236}">
+                <a16:creationId xmlns:a16="http://schemas.microsoft.com/office/drawing/2014/main" id="{41BE2C4E-706F-EF15-D027-F969AF4DCBD1}"/>
+              </a:ext>
+            </a:extLst>
+          </p:cNvPr>
+          <p:cNvPicPr>
+            <a:picLocks noChangeAspect="1"/>
+          </p:cNvPicPr>
+          <p:nvPr/>
+        </p:nvPicPr>
+        <p:blipFill>
+          <a:blip r:embed="rId2"/>
+          <a:stretch>
+            <a:fillRect/>
+          </a:stretch>
+        </p:blipFill>
+        <p:spPr>
+          <a:xfrm>
+            <a:off x="1343472" y="1721382"/>
+            <a:ext cx="2373330" cy="530509"/>
+          </a:xfrm>
+          <a:prstGeom prst="rect">
+            <a:avLst/>
+          </a:prstGeom>
+        </p:spPr>
+      </p:pic>
+      <p:pic>
+        <p:nvPicPr>
+          <p:cNvPr id="6" name="図 5">
+            <a:extLst>
+              <a:ext uri="{FF2B5EF4-FFF2-40B4-BE49-F238E27FC236}">
+                <a16:creationId xmlns:a16="http://schemas.microsoft.com/office/drawing/2014/main" id="{AE977C65-811B-333B-26C9-7209B0958684}"/>
+              </a:ext>
+            </a:extLst>
+          </p:cNvPr>
+          <p:cNvPicPr>
+            <a:picLocks noChangeAspect="1"/>
+          </p:cNvPicPr>
+          <p:nvPr/>
+        </p:nvPicPr>
+        <p:blipFill>
+          <a:blip r:embed="rId3"/>
+          <a:stretch>
+            <a:fillRect/>
+          </a:stretch>
+        </p:blipFill>
+        <p:spPr>
+          <a:xfrm>
+            <a:off x="4411888" y="1772815"/>
+            <a:ext cx="5500536" cy="390901"/>
+          </a:xfrm>
+          <a:prstGeom prst="rect">
+            <a:avLst/>
+          </a:prstGeom>
+        </p:spPr>
+      </p:pic>
+      <p:pic>
+        <p:nvPicPr>
+          <p:cNvPr id="7" name="図 6">
+            <a:extLst>
+              <a:ext uri="{FF2B5EF4-FFF2-40B4-BE49-F238E27FC236}">
+                <a16:creationId xmlns:a16="http://schemas.microsoft.com/office/drawing/2014/main" id="{1EAA6A36-FCC8-D29A-F79B-96243CCE2153}"/>
+              </a:ext>
+            </a:extLst>
+          </p:cNvPr>
+          <p:cNvPicPr>
+            <a:picLocks noChangeAspect="1"/>
+          </p:cNvPicPr>
+          <p:nvPr/>
+        </p:nvPicPr>
+        <p:blipFill>
+          <a:blip r:embed="rId4"/>
+          <a:stretch>
+            <a:fillRect/>
+          </a:stretch>
+        </p:blipFill>
+        <p:spPr>
+          <a:xfrm>
+            <a:off x="1271464" y="3032954"/>
+            <a:ext cx="3976151" cy="524631"/>
+          </a:xfrm>
+          <a:prstGeom prst="rect">
+            <a:avLst/>
+          </a:prstGeom>
+        </p:spPr>
+      </p:pic>
+      <p:pic>
+        <p:nvPicPr>
+          <p:cNvPr id="8" name="図 7">
+            <a:extLst>
+              <a:ext uri="{FF2B5EF4-FFF2-40B4-BE49-F238E27FC236}">
+                <a16:creationId xmlns:a16="http://schemas.microsoft.com/office/drawing/2014/main" id="{A96E418A-5A25-BF87-7982-B0D9D1444F64}"/>
+              </a:ext>
+            </a:extLst>
+          </p:cNvPr>
+          <p:cNvPicPr>
+            <a:picLocks noChangeAspect="1"/>
+          </p:cNvPicPr>
+          <p:nvPr/>
+        </p:nvPicPr>
+        <p:blipFill>
+          <a:blip r:embed="rId5"/>
+          <a:stretch>
+            <a:fillRect/>
+          </a:stretch>
+        </p:blipFill>
+        <p:spPr>
+          <a:xfrm>
+            <a:off x="1236592" y="4653136"/>
+            <a:ext cx="3643270" cy="524631"/>
+          </a:xfrm>
+          <a:prstGeom prst="rect">
+            <a:avLst/>
+          </a:prstGeom>
+        </p:spPr>
+      </p:pic>
+    </p:spTree>
+    <p:extLst>
+      <p:ext uri="{BB962C8B-B14F-4D97-AF65-F5344CB8AC3E}">
+        <p14:creationId xmlns:p14="http://schemas.microsoft.com/office/powerpoint/2010/main" val="888235279"/>
+      </p:ext>
+    </p:extLst>
+  </p:cSld>
+  <p:clrMapOvr>
+    <a:masterClrMapping/>
+  </p:clrMapOvr>
+</p:sld>
+</file>
+
+<file path=ppt/slides/slide14.xml><?xml version="1.0" encoding="utf-8"?>
+<p:sld xmlns:a="http://schemas.openxmlformats.org/drawingml/2006/main" xmlns:r="http://schemas.openxmlformats.org/officeDocument/2006/relationships" xmlns:p="http://schemas.openxmlformats.org/presentationml/2006/main">
+  <p:cSld>
+    <p:spTree>
+      <p:nvGrpSpPr>
+        <p:cNvPr id="1" name="">
+          <a:extLst>
+            <a:ext uri="{FF2B5EF4-FFF2-40B4-BE49-F238E27FC236}">
+              <a16:creationId xmlns:a16="http://schemas.microsoft.com/office/drawing/2014/main" id="{FB92F2C4-8BE6-6633-E2E3-A986EBDFA4DD}"/>
+            </a:ext>
+          </a:extLst>
+        </p:cNvPr>
+        <p:cNvGrpSpPr/>
+        <p:nvPr/>
+      </p:nvGrpSpPr>
+      <p:grpSpPr>
+        <a:xfrm>
+          <a:off x="0" y="0"/>
+          <a:ext cx="0" cy="0"/>
+          <a:chOff x="0" y="0"/>
+          <a:chExt cx="0" cy="0"/>
+        </a:xfrm>
+      </p:grpSpPr>
+      <p:sp>
+        <p:nvSpPr>
+          <p:cNvPr id="2" name="スライド番号プレースホルダー 1">
+            <a:extLst>
+              <a:ext uri="{FF2B5EF4-FFF2-40B4-BE49-F238E27FC236}">
+                <a16:creationId xmlns:a16="http://schemas.microsoft.com/office/drawing/2014/main" id="{213D6AB0-5ADE-5152-04A7-C57329C59C0D}"/>
+              </a:ext>
+            </a:extLst>
+          </p:cNvPr>
+          <p:cNvSpPr>
+            <a:spLocks noGrp="1"/>
+          </p:cNvSpPr>
+          <p:nvPr>
+            <p:ph type="sldNum" sz="quarter" idx="4"/>
+          </p:nvPr>
+        </p:nvSpPr>
+        <p:spPr/>
+        <p:txBody>
+          <a:bodyPr/>
+          <a:lstStyle/>
+          <a:p>
+            <a:pPr algn="r">
+              <a:defRPr/>
+            </a:pPr>
+            <a:fld id="{E17FD244-5B26-4792-B537-EF0BE56E30E9}" type="slidenum">
+              <a:rPr lang="ja-JP" altLang="en-US" smtClean="0"/>
+              <a:pPr algn="r">
+                <a:defRPr/>
+              </a:pPr>
+              <a:t>14</a:t>
+            </a:fld>
+            <a:endParaRPr lang="ja-JP" altLang="en-US" dirty="0"/>
+          </a:p>
+        </p:txBody>
+      </p:sp>
+      <p:sp>
+        <p:nvSpPr>
+          <p:cNvPr id="116" name="正方形/長方形 115">
+            <a:extLst>
+              <a:ext uri="{FF2B5EF4-FFF2-40B4-BE49-F238E27FC236}">
+                <a16:creationId xmlns:a16="http://schemas.microsoft.com/office/drawing/2014/main" id="{00B3396F-322B-43E9-ED02-F3451BB8AF6E}"/>
+              </a:ext>
+            </a:extLst>
+          </p:cNvPr>
+          <p:cNvSpPr/>
+          <p:nvPr/>
+        </p:nvSpPr>
+        <p:spPr>
+          <a:xfrm>
+            <a:off x="3149075" y="2189883"/>
+            <a:ext cx="1786931" cy="475866"/>
+          </a:xfrm>
+          <a:prstGeom prst="rect">
+            <a:avLst/>
+          </a:prstGeom>
+          <a:solidFill>
+            <a:schemeClr val="bg1">
+              <a:lumMod val="95000"/>
+            </a:schemeClr>
+          </a:solidFill>
+          <a:ln>
+            <a:noFill/>
+            <a:prstDash val="dash"/>
+            <a:headEnd type="none"/>
+            <a:tailEnd type="none"/>
+          </a:ln>
+        </p:spPr>
+        <p:style>
+          <a:lnRef idx="1">
+            <a:schemeClr val="accent1"/>
+          </a:lnRef>
+          <a:fillRef idx="0">
+            <a:schemeClr val="accent1"/>
+          </a:fillRef>
+          <a:effectRef idx="0">
+            <a:schemeClr val="accent1"/>
+          </a:effectRef>
+          <a:fontRef idx="minor">
+            <a:schemeClr val="tx1"/>
+          </a:fontRef>
+        </p:style>
+        <p:txBody>
+          <a:bodyPr rtlCol="0" anchor="ctr"/>
+          <a:lstStyle/>
+          <a:p>
+            <a:pPr algn="ctr"/>
+            <a:endParaRPr kumimoji="1" lang="ja-JP" altLang="en-US" sz="2400"/>
+          </a:p>
+        </p:txBody>
+      </p:sp>
+      <p:cxnSp>
+        <p:nvCxnSpPr>
+          <p:cNvPr id="88" name="直線矢印コネクタ 87">
+            <a:extLst>
+              <a:ext uri="{FF2B5EF4-FFF2-40B4-BE49-F238E27FC236}">
+                <a16:creationId xmlns:a16="http://schemas.microsoft.com/office/drawing/2014/main" id="{13B6E08A-EDE6-3F86-41EC-7C3CA0E8EE0F}"/>
+              </a:ext>
+            </a:extLst>
+          </p:cNvPr>
+          <p:cNvCxnSpPr>
+            <a:cxnSpLocks/>
+          </p:cNvCxnSpPr>
+          <p:nvPr/>
+        </p:nvCxnSpPr>
+        <p:spPr>
+          <a:xfrm>
+            <a:off x="2236848" y="2408697"/>
+            <a:ext cx="4789894" cy="40127"/>
+          </a:xfrm>
+          <a:prstGeom prst="straightConnector1">
+            <a:avLst/>
+          </a:prstGeom>
+          <a:ln w="38100">
+            <a:solidFill>
+              <a:schemeClr val="bg1">
+                <a:lumMod val="75000"/>
+              </a:schemeClr>
+            </a:solidFill>
+            <a:tailEnd type="triangle"/>
+          </a:ln>
+        </p:spPr>
+        <p:style>
+          <a:lnRef idx="1">
+            <a:schemeClr val="accent1"/>
+          </a:lnRef>
+          <a:fillRef idx="0">
+            <a:schemeClr val="accent1"/>
+          </a:fillRef>
+          <a:effectRef idx="0">
+            <a:schemeClr val="accent1"/>
+          </a:effectRef>
+          <a:fontRef idx="minor">
+            <a:schemeClr val="tx1"/>
+          </a:fontRef>
+        </p:style>
+      </p:cxnSp>
+      <p:sp>
+        <p:nvSpPr>
+          <p:cNvPr id="89" name="テキスト ボックス 88">
+            <a:extLst>
+              <a:ext uri="{FF2B5EF4-FFF2-40B4-BE49-F238E27FC236}">
+                <a16:creationId xmlns:a16="http://schemas.microsoft.com/office/drawing/2014/main" id="{65776CD7-6904-1A2F-DF54-630720DE72B1}"/>
+              </a:ext>
+            </a:extLst>
+          </p:cNvPr>
+          <p:cNvSpPr txBox="1"/>
+          <p:nvPr/>
+        </p:nvSpPr>
+        <p:spPr>
+          <a:xfrm>
+            <a:off x="5605041" y="1977676"/>
+            <a:ext cx="3127223" cy="529414"/>
+          </a:xfrm>
+          <a:prstGeom prst="rect">
+            <a:avLst/>
+          </a:prstGeom>
+          <a:noFill/>
+        </p:spPr>
+        <p:txBody>
+          <a:bodyPr wrap="none" rtlCol="0">
+            <a:spAutoFit/>
+          </a:bodyPr>
+          <a:lstStyle/>
+          <a:p>
+            <a:r>
+              <a:rPr kumimoji="1" lang="en-US" altLang="ja-JP" sz="2400" b="1" i="1">
+                <a:latin typeface="Times New Roman" panose="02020603050405020304" pitchFamily="18" charset="0"/>
+                <a:cs typeface="Times New Roman" panose="02020603050405020304" pitchFamily="18" charset="0"/>
+              </a:rPr>
+              <a:t>T </a:t>
+            </a:r>
+            <a:r>
+              <a:rPr kumimoji="1" lang="en-US" altLang="ja-JP" sz="2400">
+                <a:latin typeface="Times New Roman" panose="02020603050405020304" pitchFamily="18" charset="0"/>
+                <a:cs typeface="Times New Roman" panose="02020603050405020304" pitchFamily="18" charset="0"/>
+              </a:rPr>
+              <a:t>(simulation time)  </a:t>
+            </a:r>
+            <a:endParaRPr kumimoji="1" lang="ja-JP" altLang="en-US" sz="2400">
+              <a:latin typeface="Times New Roman" panose="02020603050405020304" pitchFamily="18" charset="0"/>
+              <a:cs typeface="Times New Roman" panose="02020603050405020304" pitchFamily="18" charset="0"/>
+            </a:endParaRPr>
+          </a:p>
+        </p:txBody>
+      </p:sp>
+      <p:sp>
+        <p:nvSpPr>
+          <p:cNvPr id="90" name="円/楕円 89">
+            <a:extLst>
+              <a:ext uri="{FF2B5EF4-FFF2-40B4-BE49-F238E27FC236}">
+                <a16:creationId xmlns:a16="http://schemas.microsoft.com/office/drawing/2014/main" id="{2C5F2175-1F0E-0E4A-F823-8057CD6A17D5}"/>
+              </a:ext>
+            </a:extLst>
+          </p:cNvPr>
+          <p:cNvSpPr/>
+          <p:nvPr/>
+        </p:nvSpPr>
+        <p:spPr>
+          <a:xfrm>
+            <a:off x="3535915" y="2305732"/>
+            <a:ext cx="216000" cy="216000"/>
+          </a:xfrm>
+          <a:prstGeom prst="ellipse">
+            <a:avLst/>
+          </a:prstGeom>
+          <a:solidFill>
+            <a:schemeClr val="tx1"/>
+          </a:solidFill>
+          <a:ln>
+            <a:solidFill>
+              <a:schemeClr val="tx1"/>
+            </a:solidFill>
+          </a:ln>
+        </p:spPr>
+        <p:style>
+          <a:lnRef idx="1">
+            <a:schemeClr val="accent1"/>
+          </a:lnRef>
+          <a:fillRef idx="0">
+            <a:schemeClr val="accent1"/>
+          </a:fillRef>
+          <a:effectRef idx="0">
+            <a:schemeClr val="accent1"/>
+          </a:effectRef>
+          <a:fontRef idx="minor">
+            <a:schemeClr val="tx1"/>
+          </a:fontRef>
+        </p:style>
+        <p:txBody>
+          <a:bodyPr rtlCol="0" anchor="ctr"/>
+          <a:lstStyle/>
+          <a:p>
+            <a:pPr algn="ctr"/>
+            <a:endParaRPr kumimoji="1" lang="ja-JP" altLang="en-US" sz="2400"/>
+          </a:p>
+        </p:txBody>
+      </p:sp>
+      <p:sp>
+        <p:nvSpPr>
+          <p:cNvPr id="95" name="円/楕円 94">
+            <a:extLst>
+              <a:ext uri="{FF2B5EF4-FFF2-40B4-BE49-F238E27FC236}">
+                <a16:creationId xmlns:a16="http://schemas.microsoft.com/office/drawing/2014/main" id="{D3C1A052-38BE-933C-27CD-58B63398E51F}"/>
+              </a:ext>
+            </a:extLst>
+          </p:cNvPr>
+          <p:cNvSpPr/>
+          <p:nvPr/>
+        </p:nvSpPr>
+        <p:spPr>
+          <a:xfrm>
+            <a:off x="4845845" y="2338734"/>
+            <a:ext cx="216000" cy="216000"/>
+          </a:xfrm>
+          <a:prstGeom prst="ellipse">
+            <a:avLst/>
+          </a:prstGeom>
+          <a:solidFill>
+            <a:schemeClr val="bg1"/>
+          </a:solidFill>
+          <a:ln>
+            <a:solidFill>
+              <a:schemeClr val="tx1"/>
+            </a:solidFill>
+          </a:ln>
+        </p:spPr>
+        <p:style>
+          <a:lnRef idx="1">
+            <a:schemeClr val="accent1"/>
+          </a:lnRef>
+          <a:fillRef idx="0">
+            <a:schemeClr val="accent1"/>
+          </a:fillRef>
+          <a:effectRef idx="0">
+            <a:schemeClr val="accent1"/>
+          </a:effectRef>
+          <a:fontRef idx="minor">
+            <a:schemeClr val="tx1"/>
+          </a:fontRef>
+        </p:style>
+        <p:txBody>
+          <a:bodyPr rtlCol="0" anchor="ctr"/>
+          <a:lstStyle/>
+          <a:p>
+            <a:pPr algn="ctr"/>
+            <a:endParaRPr kumimoji="1" lang="ja-JP" altLang="en-US" sz="2400"/>
+          </a:p>
+        </p:txBody>
+      </p:sp>
+      <p:sp>
+        <p:nvSpPr>
+          <p:cNvPr id="96" name="テキスト ボックス 95">
+            <a:extLst>
+              <a:ext uri="{FF2B5EF4-FFF2-40B4-BE49-F238E27FC236}">
+                <a16:creationId xmlns:a16="http://schemas.microsoft.com/office/drawing/2014/main" id="{04F2BCB2-7C99-B66E-A9F3-1C234EE106DE}"/>
+              </a:ext>
+            </a:extLst>
+          </p:cNvPr>
+          <p:cNvSpPr txBox="1"/>
+          <p:nvPr/>
+        </p:nvSpPr>
+        <p:spPr>
+          <a:xfrm>
+            <a:off x="4939260" y="2428760"/>
+            <a:ext cx="499195" cy="529414"/>
+          </a:xfrm>
+          <a:prstGeom prst="rect">
+            <a:avLst/>
+          </a:prstGeom>
+          <a:noFill/>
+        </p:spPr>
+        <p:txBody>
+          <a:bodyPr wrap="none" rtlCol="0">
+            <a:spAutoFit/>
+          </a:bodyPr>
+          <a:lstStyle/>
+          <a:p>
+            <a:r>
+              <a:rPr kumimoji="1" lang="en-US" altLang="ja-JP" sz="2400" b="1" i="1">
+                <a:latin typeface="Times New Roman" panose="02020603050405020304" pitchFamily="18" charset="0"/>
+                <a:cs typeface="Times New Roman" panose="02020603050405020304" pitchFamily="18" charset="0"/>
+              </a:rPr>
+              <a:t>T</a:t>
+            </a:r>
+            <a:r>
+              <a:rPr kumimoji="1" lang="en-US" altLang="ja-JP" sz="2400" b="1" i="1" baseline="-25000">
+                <a:latin typeface="Times New Roman" panose="02020603050405020304" pitchFamily="18" charset="0"/>
+                <a:cs typeface="Times New Roman" panose="02020603050405020304" pitchFamily="18" charset="0"/>
+              </a:rPr>
+              <a:t>c</a:t>
+            </a:r>
+            <a:endParaRPr kumimoji="1" lang="ja-JP" altLang="en-US" sz="2400" baseline="-25000">
+              <a:latin typeface="Times New Roman" panose="02020603050405020304" pitchFamily="18" charset="0"/>
+              <a:cs typeface="Times New Roman" panose="02020603050405020304" pitchFamily="18" charset="0"/>
+            </a:endParaRPr>
+          </a:p>
+        </p:txBody>
+      </p:sp>
+      <p:sp>
+        <p:nvSpPr>
+          <p:cNvPr id="97" name="テキスト ボックス 96">
+            <a:extLst>
+              <a:ext uri="{FF2B5EF4-FFF2-40B4-BE49-F238E27FC236}">
+                <a16:creationId xmlns:a16="http://schemas.microsoft.com/office/drawing/2014/main" id="{7F6EAFD1-44C7-8147-A76F-08A9D8A874CF}"/>
+              </a:ext>
+            </a:extLst>
+          </p:cNvPr>
+          <p:cNvSpPr txBox="1"/>
+          <p:nvPr/>
+        </p:nvSpPr>
+        <p:spPr>
+          <a:xfrm>
+            <a:off x="3656388" y="2443750"/>
+            <a:ext cx="418513" cy="461665"/>
+          </a:xfrm>
+          <a:prstGeom prst="rect">
+            <a:avLst/>
+          </a:prstGeom>
+          <a:noFill/>
+        </p:spPr>
+        <p:txBody>
+          <a:bodyPr wrap="none" rtlCol="0">
+            <a:spAutoFit/>
+          </a:bodyPr>
+          <a:lstStyle/>
+          <a:p>
+            <a:r>
+              <a:rPr kumimoji="1" lang="en-US" altLang="ja-JP" sz="2400" b="1" i="1">
+                <a:latin typeface="Times New Roman" panose="02020603050405020304" pitchFamily="18" charset="0"/>
+                <a:cs typeface="Times New Roman" panose="02020603050405020304" pitchFamily="18" charset="0"/>
+              </a:rPr>
+              <a:t>T</a:t>
+            </a:r>
+            <a:r>
+              <a:rPr lang="en-US" altLang="ja-JP" sz="2400" b="1" i="1" baseline="-25000">
+                <a:latin typeface="Times New Roman" panose="02020603050405020304" pitchFamily="18" charset="0"/>
+                <a:cs typeface="Times New Roman" panose="02020603050405020304" pitchFamily="18" charset="0"/>
+              </a:rPr>
+              <a:t>i</a:t>
+            </a:r>
+            <a:endParaRPr kumimoji="1" lang="ja-JP" altLang="en-US" sz="2400" baseline="-25000">
+              <a:latin typeface="Times New Roman" panose="02020603050405020304" pitchFamily="18" charset="0"/>
+              <a:cs typeface="Times New Roman" panose="02020603050405020304" pitchFamily="18" charset="0"/>
+            </a:endParaRPr>
+          </a:p>
+        </p:txBody>
+      </p:sp>
+      <p:cxnSp>
+        <p:nvCxnSpPr>
+          <p:cNvPr id="105" name="直線矢印コネクタ 104">
+            <a:extLst>
+              <a:ext uri="{FF2B5EF4-FFF2-40B4-BE49-F238E27FC236}">
+                <a16:creationId xmlns:a16="http://schemas.microsoft.com/office/drawing/2014/main" id="{C54A7C3D-D32E-D04E-0DC0-19860C0D9E0A}"/>
+              </a:ext>
+            </a:extLst>
+          </p:cNvPr>
+          <p:cNvCxnSpPr>
+            <a:cxnSpLocks/>
+          </p:cNvCxnSpPr>
+          <p:nvPr/>
+        </p:nvCxnSpPr>
+        <p:spPr>
+          <a:xfrm flipH="1">
+            <a:off x="3643655" y="4725144"/>
+            <a:ext cx="2897601" cy="0"/>
+          </a:xfrm>
+          <a:prstGeom prst="straightConnector1">
+            <a:avLst/>
+          </a:prstGeom>
+          <a:ln>
+            <a:solidFill>
+              <a:schemeClr val="tx1"/>
+            </a:solidFill>
+            <a:headEnd type="triangle"/>
+            <a:tailEnd type="triangle"/>
+          </a:ln>
+        </p:spPr>
+        <p:style>
+          <a:lnRef idx="1">
+            <a:schemeClr val="accent1"/>
+          </a:lnRef>
+          <a:fillRef idx="0">
+            <a:schemeClr val="accent1"/>
+          </a:fillRef>
+          <a:effectRef idx="0">
+            <a:schemeClr val="accent1"/>
+          </a:effectRef>
+          <a:fontRef idx="minor">
+            <a:schemeClr val="tx1"/>
+          </a:fontRef>
+        </p:style>
+      </p:cxnSp>
+      <p:sp>
+        <p:nvSpPr>
+          <p:cNvPr id="106" name="テキスト ボックス 105">
+            <a:extLst>
+              <a:ext uri="{FF2B5EF4-FFF2-40B4-BE49-F238E27FC236}">
+                <a16:creationId xmlns:a16="http://schemas.microsoft.com/office/drawing/2014/main" id="{8BB2A4CD-D837-83F7-1B48-9CB9863193BF}"/>
+              </a:ext>
+            </a:extLst>
+          </p:cNvPr>
+          <p:cNvSpPr txBox="1"/>
+          <p:nvPr/>
+        </p:nvSpPr>
+        <p:spPr>
+          <a:xfrm>
+            <a:off x="4268921" y="4653136"/>
+            <a:ext cx="784191" cy="461666"/>
+          </a:xfrm>
+          <a:prstGeom prst="rect">
+            <a:avLst/>
+          </a:prstGeom>
+          <a:noFill/>
+        </p:spPr>
+        <p:txBody>
+          <a:bodyPr wrap="none" rtlCol="0">
+            <a:spAutoFit/>
+          </a:bodyPr>
+          <a:lstStyle/>
+          <a:p>
+            <a:r>
+              <a:rPr kumimoji="1" lang="en-US" altLang="ja-JP" sz="2400" b="1" i="1">
+                <a:latin typeface="Times New Roman" panose="02020603050405020304" pitchFamily="18" charset="0"/>
+                <a:cs typeface="Times New Roman" panose="02020603050405020304" pitchFamily="18" charset="0"/>
+              </a:rPr>
+              <a:t>D</a:t>
+            </a:r>
+            <a:r>
+              <a:rPr lang="en-US" altLang="ja-JP" sz="2400" b="1" baseline="-25000">
+                <a:latin typeface="Times New Roman" panose="02020603050405020304" pitchFamily="18" charset="0"/>
+                <a:cs typeface="Times New Roman" panose="02020603050405020304" pitchFamily="18" charset="0"/>
+              </a:rPr>
+              <a:t>max</a:t>
+            </a:r>
+            <a:endParaRPr kumimoji="1" lang="ja-JP" altLang="en-US" sz="2400">
+              <a:latin typeface="Times New Roman" panose="02020603050405020304" pitchFamily="18" charset="0"/>
+              <a:cs typeface="Times New Roman" panose="02020603050405020304" pitchFamily="18" charset="0"/>
+            </a:endParaRPr>
+          </a:p>
+        </p:txBody>
+      </p:sp>
+      <p:cxnSp>
+        <p:nvCxnSpPr>
+          <p:cNvPr id="107" name="直線矢印コネクタ 106">
+            <a:extLst>
+              <a:ext uri="{FF2B5EF4-FFF2-40B4-BE49-F238E27FC236}">
+                <a16:creationId xmlns:a16="http://schemas.microsoft.com/office/drawing/2014/main" id="{49A9A2FD-CBED-BA86-6292-2B539AA1DAEC}"/>
+              </a:ext>
+            </a:extLst>
+          </p:cNvPr>
+          <p:cNvCxnSpPr>
+            <a:cxnSpLocks/>
+          </p:cNvCxnSpPr>
+          <p:nvPr/>
+        </p:nvCxnSpPr>
+        <p:spPr>
+          <a:xfrm>
+            <a:off x="6541256" y="2443750"/>
+            <a:ext cx="0" cy="2440219"/>
+          </a:xfrm>
+          <a:prstGeom prst="straightConnector1">
+            <a:avLst/>
+          </a:prstGeom>
+          <a:ln>
+            <a:solidFill>
+              <a:schemeClr val="bg1">
+                <a:lumMod val="75000"/>
+              </a:schemeClr>
+            </a:solidFill>
+            <a:prstDash val="dash"/>
+            <a:headEnd type="none"/>
+            <a:tailEnd type="none"/>
+          </a:ln>
+        </p:spPr>
+        <p:style>
+          <a:lnRef idx="1">
+            <a:schemeClr val="accent1"/>
+          </a:lnRef>
+          <a:fillRef idx="0">
+            <a:schemeClr val="accent1"/>
+          </a:fillRef>
+          <a:effectRef idx="0">
+            <a:schemeClr val="accent1"/>
+          </a:effectRef>
+          <a:fontRef idx="minor">
+            <a:schemeClr val="tx1"/>
+          </a:fontRef>
+        </p:style>
+      </p:cxnSp>
+      <p:cxnSp>
+        <p:nvCxnSpPr>
+          <p:cNvPr id="110" name="直線矢印コネクタ 109">
+            <a:extLst>
+              <a:ext uri="{FF2B5EF4-FFF2-40B4-BE49-F238E27FC236}">
+                <a16:creationId xmlns:a16="http://schemas.microsoft.com/office/drawing/2014/main" id="{8AFD8BEB-CCDA-E200-B639-93B86ACBF46B}"/>
+              </a:ext>
+            </a:extLst>
+          </p:cNvPr>
+          <p:cNvCxnSpPr>
+            <a:cxnSpLocks/>
+          </p:cNvCxnSpPr>
+          <p:nvPr/>
+        </p:nvCxnSpPr>
+        <p:spPr>
+          <a:xfrm>
+            <a:off x="3651523" y="2421752"/>
+            <a:ext cx="30385" cy="2462217"/>
+          </a:xfrm>
+          <a:prstGeom prst="straightConnector1">
+            <a:avLst/>
+          </a:prstGeom>
+          <a:ln>
+            <a:solidFill>
+              <a:schemeClr val="bg1">
+                <a:lumMod val="50000"/>
+              </a:schemeClr>
+            </a:solidFill>
+            <a:prstDash val="dash"/>
+            <a:headEnd type="none"/>
+            <a:tailEnd type="none"/>
+          </a:ln>
+        </p:spPr>
+        <p:style>
+          <a:lnRef idx="1">
+            <a:schemeClr val="accent1"/>
+          </a:lnRef>
+          <a:fillRef idx="0">
+            <a:schemeClr val="accent1"/>
+          </a:fillRef>
+          <a:effectRef idx="0">
+            <a:schemeClr val="accent1"/>
+          </a:effectRef>
+          <a:fontRef idx="minor">
+            <a:schemeClr val="tx1"/>
+          </a:fontRef>
+        </p:style>
+      </p:cxnSp>
+      <p:cxnSp>
+        <p:nvCxnSpPr>
+          <p:cNvPr id="121" name="直線コネクタ 120">
+            <a:extLst>
+              <a:ext uri="{FF2B5EF4-FFF2-40B4-BE49-F238E27FC236}">
+                <a16:creationId xmlns:a16="http://schemas.microsoft.com/office/drawing/2014/main" id="{315583C5-A8AF-6E8A-07F8-7EEAADD2A0C6}"/>
+              </a:ext>
+            </a:extLst>
+          </p:cNvPr>
+          <p:cNvCxnSpPr>
+            <a:cxnSpLocks/>
+          </p:cNvCxnSpPr>
+          <p:nvPr/>
+        </p:nvCxnSpPr>
+        <p:spPr>
+          <a:xfrm>
+            <a:off x="5765238" y="3831430"/>
+            <a:ext cx="0" cy="0"/>
+          </a:xfrm>
+          <a:prstGeom prst="line">
+            <a:avLst/>
+          </a:prstGeom>
+        </p:spPr>
+        <p:style>
+          <a:lnRef idx="1">
+            <a:schemeClr val="accent1"/>
+          </a:lnRef>
+          <a:fillRef idx="0">
+            <a:schemeClr val="accent1"/>
+          </a:fillRef>
+          <a:effectRef idx="0">
+            <a:schemeClr val="accent1"/>
+          </a:effectRef>
+          <a:fontRef idx="minor">
+            <a:schemeClr val="tx1"/>
+          </a:fontRef>
+        </p:style>
+      </p:cxnSp>
+      <p:cxnSp>
+        <p:nvCxnSpPr>
+          <p:cNvPr id="67" name="直線コネクタ 66">
+            <a:extLst>
+              <a:ext uri="{FF2B5EF4-FFF2-40B4-BE49-F238E27FC236}">
+                <a16:creationId xmlns:a16="http://schemas.microsoft.com/office/drawing/2014/main" id="{35006AB6-8593-F352-8086-CC3CACBC3CD1}"/>
+              </a:ext>
+            </a:extLst>
+          </p:cNvPr>
+          <p:cNvCxnSpPr>
+            <a:cxnSpLocks/>
+          </p:cNvCxnSpPr>
+          <p:nvPr/>
+        </p:nvCxnSpPr>
+        <p:spPr>
+          <a:xfrm flipH="1">
+            <a:off x="5460546" y="5517232"/>
+            <a:ext cx="304708" cy="0"/>
+          </a:xfrm>
+          <a:prstGeom prst="line">
+            <a:avLst/>
+          </a:prstGeom>
+          <a:ln>
+            <a:solidFill>
+              <a:schemeClr val="bg1">
+                <a:lumMod val="85000"/>
+              </a:schemeClr>
+            </a:solidFill>
+          </a:ln>
+        </p:spPr>
+        <p:style>
+          <a:lnRef idx="1">
+            <a:schemeClr val="accent1"/>
+          </a:lnRef>
+          <a:fillRef idx="0">
+            <a:schemeClr val="accent1"/>
+          </a:fillRef>
+          <a:effectRef idx="0">
+            <a:schemeClr val="accent1"/>
+          </a:effectRef>
+          <a:fontRef idx="minor">
+            <a:schemeClr val="tx1"/>
+          </a:fontRef>
+        </p:style>
+      </p:cxnSp>
+      <p:cxnSp>
+        <p:nvCxnSpPr>
+          <p:cNvPr id="52" name="直線コネクタ 51">
+            <a:extLst>
+              <a:ext uri="{FF2B5EF4-FFF2-40B4-BE49-F238E27FC236}">
+                <a16:creationId xmlns:a16="http://schemas.microsoft.com/office/drawing/2014/main" id="{D1CDE02F-D9CA-4C1B-3317-7C0A06B346C2}"/>
+              </a:ext>
+            </a:extLst>
+          </p:cNvPr>
+          <p:cNvCxnSpPr>
+            <a:cxnSpLocks/>
+          </p:cNvCxnSpPr>
+          <p:nvPr/>
+        </p:nvCxnSpPr>
+        <p:spPr>
+          <a:xfrm>
+            <a:off x="3651523" y="3457837"/>
+            <a:ext cx="1786932" cy="0"/>
+          </a:xfrm>
+          <a:prstGeom prst="line">
+            <a:avLst/>
+          </a:prstGeom>
+          <a:ln>
+            <a:solidFill>
+              <a:schemeClr val="tx1"/>
+            </a:solidFill>
+            <a:headEnd type="triangle"/>
+            <a:tailEnd type="triangle"/>
+          </a:ln>
+        </p:spPr>
+        <p:style>
+          <a:lnRef idx="1">
+            <a:schemeClr val="accent1"/>
+          </a:lnRef>
+          <a:fillRef idx="0">
+            <a:schemeClr val="accent1"/>
+          </a:fillRef>
+          <a:effectRef idx="0">
+            <a:schemeClr val="accent1"/>
+          </a:effectRef>
+          <a:fontRef idx="minor">
+            <a:schemeClr val="tx1"/>
+          </a:fontRef>
+        </p:style>
+      </p:cxnSp>
+      <p:sp>
+        <p:nvSpPr>
+          <p:cNvPr id="8" name="タイトル 7">
+            <a:extLst>
+              <a:ext uri="{FF2B5EF4-FFF2-40B4-BE49-F238E27FC236}">
+                <a16:creationId xmlns:a16="http://schemas.microsoft.com/office/drawing/2014/main" id="{DB47F401-FA21-75E3-0F30-4367556D4CB1}"/>
+              </a:ext>
+            </a:extLst>
+          </p:cNvPr>
+          <p:cNvSpPr>
+            <a:spLocks noGrp="1"/>
+          </p:cNvSpPr>
+          <p:nvPr>
+            <p:ph type="title"/>
+          </p:nvPr>
+        </p:nvSpPr>
+        <p:spPr/>
+        <p:txBody>
+          <a:bodyPr/>
+          <a:lstStyle/>
+          <a:p>
+            <a:r>
+              <a:rPr lang="ja-JP" altLang="en-US"/>
+              <a:t>進行性と後方デッドゾーン</a:t>
+            </a:r>
+          </a:p>
+        </p:txBody>
+      </p:sp>
+      <p:sp>
+        <p:nvSpPr>
+          <p:cNvPr id="11" name="テキスト ボックス 10">
+            <a:extLst>
+              <a:ext uri="{FF2B5EF4-FFF2-40B4-BE49-F238E27FC236}">
+                <a16:creationId xmlns:a16="http://schemas.microsoft.com/office/drawing/2014/main" id="{2C38DA81-D989-589A-15A1-C6B9E270DF20}"/>
+              </a:ext>
+            </a:extLst>
+          </p:cNvPr>
+          <p:cNvSpPr txBox="1"/>
+          <p:nvPr/>
+        </p:nvSpPr>
+        <p:spPr>
+          <a:xfrm>
+            <a:off x="4229924" y="3401601"/>
+            <a:ext cx="610873" cy="461665"/>
+          </a:xfrm>
+          <a:prstGeom prst="rect">
+            <a:avLst/>
+          </a:prstGeom>
+          <a:noFill/>
+        </p:spPr>
+        <p:txBody>
+          <a:bodyPr wrap="none" rtlCol="0">
+            <a:spAutoFit/>
+          </a:bodyPr>
+          <a:lstStyle/>
+          <a:p>
+            <a:r>
+              <a:rPr kumimoji="1" lang="en-US" altLang="ja-JP" sz="2400" b="1" i="1">
+                <a:latin typeface="Times New Roman" panose="02020603050405020304" pitchFamily="18" charset="0"/>
+                <a:cs typeface="Times New Roman" panose="02020603050405020304" pitchFamily="18" charset="0"/>
+              </a:rPr>
+              <a:t>ΔT</a:t>
+            </a:r>
+            <a:r>
+              <a:rPr lang="en-US" altLang="ja-JP" sz="2400" b="1" i="1" baseline="-25000">
+                <a:latin typeface="Times New Roman" panose="02020603050405020304" pitchFamily="18" charset="0"/>
+                <a:cs typeface="Times New Roman" panose="02020603050405020304" pitchFamily="18" charset="0"/>
+              </a:rPr>
+              <a:t>i</a:t>
+            </a:r>
+            <a:endParaRPr kumimoji="1" lang="ja-JP" altLang="en-US" sz="2400" baseline="-25000">
+              <a:latin typeface="Times New Roman" panose="02020603050405020304" pitchFamily="18" charset="0"/>
+              <a:cs typeface="Times New Roman" panose="02020603050405020304" pitchFamily="18" charset="0"/>
+            </a:endParaRPr>
+          </a:p>
+        </p:txBody>
+      </p:sp>
+      <p:cxnSp>
+        <p:nvCxnSpPr>
+          <p:cNvPr id="13" name="直線矢印コネクタ 12">
+            <a:extLst>
+              <a:ext uri="{FF2B5EF4-FFF2-40B4-BE49-F238E27FC236}">
+                <a16:creationId xmlns:a16="http://schemas.microsoft.com/office/drawing/2014/main" id="{2D4FC02C-27F9-8E52-7A7D-097ACC202630}"/>
+              </a:ext>
+            </a:extLst>
+          </p:cNvPr>
+          <p:cNvCxnSpPr>
+            <a:cxnSpLocks/>
+          </p:cNvCxnSpPr>
+          <p:nvPr/>
+        </p:nvCxnSpPr>
+        <p:spPr>
+          <a:xfrm>
+            <a:off x="4953845" y="2217806"/>
+            <a:ext cx="0" cy="2236056"/>
+          </a:xfrm>
+          <a:prstGeom prst="straightConnector1">
+            <a:avLst/>
+          </a:prstGeom>
+          <a:ln>
+            <a:solidFill>
+              <a:schemeClr val="bg1">
+                <a:lumMod val="75000"/>
+              </a:schemeClr>
+            </a:solidFill>
+            <a:prstDash val="dash"/>
+            <a:headEnd type="none"/>
+            <a:tailEnd type="none"/>
+          </a:ln>
+        </p:spPr>
+        <p:style>
+          <a:lnRef idx="1">
+            <a:schemeClr val="accent1"/>
+          </a:lnRef>
+          <a:fillRef idx="0">
+            <a:schemeClr val="accent1"/>
+          </a:fillRef>
+          <a:effectRef idx="0">
+            <a:schemeClr val="accent1"/>
+          </a:effectRef>
+          <a:fontRef idx="minor">
+            <a:schemeClr val="tx1"/>
+          </a:fontRef>
+        </p:style>
+      </p:cxnSp>
+      <p:sp>
+        <p:nvSpPr>
+          <p:cNvPr id="14" name="テキスト ボックス 13">
+            <a:extLst>
+              <a:ext uri="{FF2B5EF4-FFF2-40B4-BE49-F238E27FC236}">
+                <a16:creationId xmlns:a16="http://schemas.microsoft.com/office/drawing/2014/main" id="{048610F7-93B1-017D-616D-56FF17FAF660}"/>
+              </a:ext>
+            </a:extLst>
+          </p:cNvPr>
+          <p:cNvSpPr txBox="1"/>
+          <p:nvPr/>
+        </p:nvSpPr>
+        <p:spPr>
+          <a:xfrm>
+            <a:off x="4936011" y="3325985"/>
+            <a:ext cx="415498" cy="369332"/>
+          </a:xfrm>
+          <a:prstGeom prst="rect">
+            <a:avLst/>
+          </a:prstGeom>
+          <a:noFill/>
+        </p:spPr>
+        <p:txBody>
+          <a:bodyPr wrap="none" rtlCol="0">
+            <a:spAutoFit/>
+          </a:bodyPr>
+          <a:lstStyle/>
+          <a:p>
+            <a:r>
+              <a:rPr kumimoji="1" lang="ja-JP" altLang="en-US"/>
+              <a:t>✖️</a:t>
+            </a:r>
+          </a:p>
+        </p:txBody>
+      </p:sp>
+      <p:cxnSp>
+        <p:nvCxnSpPr>
+          <p:cNvPr id="15" name="直線コネクタ 14">
+            <a:extLst>
+              <a:ext uri="{FF2B5EF4-FFF2-40B4-BE49-F238E27FC236}">
+                <a16:creationId xmlns:a16="http://schemas.microsoft.com/office/drawing/2014/main" id="{7BCBC335-F275-F026-9206-D745EFFE5769}"/>
+              </a:ext>
+            </a:extLst>
+          </p:cNvPr>
+          <p:cNvCxnSpPr>
+            <a:cxnSpLocks/>
+          </p:cNvCxnSpPr>
+          <p:nvPr/>
+        </p:nvCxnSpPr>
+        <p:spPr>
+          <a:xfrm>
+            <a:off x="4953845" y="4113171"/>
+            <a:ext cx="1947451" cy="0"/>
+          </a:xfrm>
+          <a:prstGeom prst="line">
+            <a:avLst/>
+          </a:prstGeom>
+          <a:ln>
+            <a:solidFill>
+              <a:schemeClr val="tx1"/>
+            </a:solidFill>
+            <a:headEnd type="triangle"/>
+            <a:tailEnd type="triangle"/>
+          </a:ln>
+        </p:spPr>
+        <p:style>
+          <a:lnRef idx="1">
+            <a:schemeClr val="accent1"/>
+          </a:lnRef>
+          <a:fillRef idx="0">
+            <a:schemeClr val="accent1"/>
+          </a:fillRef>
+          <a:effectRef idx="0">
+            <a:schemeClr val="accent1"/>
+          </a:effectRef>
+          <a:fontRef idx="minor">
+            <a:schemeClr val="tx1"/>
+          </a:fontRef>
+        </p:style>
+      </p:cxnSp>
+      <p:sp>
+        <p:nvSpPr>
+          <p:cNvPr id="16" name="テキスト ボックス 15">
+            <a:extLst>
+              <a:ext uri="{FF2B5EF4-FFF2-40B4-BE49-F238E27FC236}">
+                <a16:creationId xmlns:a16="http://schemas.microsoft.com/office/drawing/2014/main" id="{90A5CF23-3783-BB18-46A5-DEC544EAE1F2}"/>
+              </a:ext>
+            </a:extLst>
+          </p:cNvPr>
+          <p:cNvSpPr txBox="1"/>
+          <p:nvPr/>
+        </p:nvSpPr>
+        <p:spPr>
+          <a:xfrm>
+            <a:off x="5532246" y="4056935"/>
+            <a:ext cx="655949" cy="461665"/>
+          </a:xfrm>
+          <a:prstGeom prst="rect">
+            <a:avLst/>
+          </a:prstGeom>
+          <a:noFill/>
+        </p:spPr>
+        <p:txBody>
+          <a:bodyPr wrap="none" rtlCol="0">
+            <a:spAutoFit/>
+          </a:bodyPr>
+          <a:lstStyle/>
+          <a:p>
+            <a:r>
+              <a:rPr kumimoji="1" lang="en-US" altLang="ja-JP" sz="2400" b="1" i="1">
+                <a:latin typeface="Times New Roman" panose="02020603050405020304" pitchFamily="18" charset="0"/>
+                <a:cs typeface="Times New Roman" panose="02020603050405020304" pitchFamily="18" charset="0"/>
+              </a:rPr>
+              <a:t>ΔT</a:t>
+            </a:r>
+            <a:r>
+              <a:rPr lang="en-US" altLang="ja-JP" sz="2400" b="1" i="1" baseline="-25000">
+                <a:latin typeface="Times New Roman" panose="02020603050405020304" pitchFamily="18" charset="0"/>
+                <a:cs typeface="Times New Roman" panose="02020603050405020304" pitchFamily="18" charset="0"/>
+              </a:rPr>
+              <a:t>c</a:t>
+            </a:r>
+            <a:endParaRPr kumimoji="1" lang="ja-JP" altLang="en-US" sz="2400" baseline="-25000">
+              <a:latin typeface="Times New Roman" panose="02020603050405020304" pitchFamily="18" charset="0"/>
+              <a:cs typeface="Times New Roman" panose="02020603050405020304" pitchFamily="18" charset="0"/>
+            </a:endParaRPr>
+          </a:p>
+        </p:txBody>
+      </p:sp>
+      <p:sp>
+        <p:nvSpPr>
+          <p:cNvPr id="19" name="テキスト ボックス 18">
+            <a:extLst>
+              <a:ext uri="{FF2B5EF4-FFF2-40B4-BE49-F238E27FC236}">
+                <a16:creationId xmlns:a16="http://schemas.microsoft.com/office/drawing/2014/main" id="{A307C52F-E06E-ECB9-6D28-029956F51A2B}"/>
+              </a:ext>
+            </a:extLst>
+          </p:cNvPr>
+          <p:cNvSpPr txBox="1"/>
+          <p:nvPr/>
+        </p:nvSpPr>
+        <p:spPr>
+          <a:xfrm>
+            <a:off x="6485798" y="3952601"/>
+            <a:ext cx="415498" cy="369332"/>
+          </a:xfrm>
+          <a:prstGeom prst="rect">
+            <a:avLst/>
+          </a:prstGeom>
+          <a:noFill/>
+        </p:spPr>
+        <p:txBody>
+          <a:bodyPr wrap="none" rtlCol="0">
+            <a:spAutoFit/>
+          </a:bodyPr>
+          <a:lstStyle/>
+          <a:p>
+            <a:r>
+              <a:rPr kumimoji="1" lang="ja-JP" altLang="en-US"/>
+              <a:t>✖️</a:t>
+            </a:r>
+          </a:p>
+        </p:txBody>
+      </p:sp>
+      <p:cxnSp>
+        <p:nvCxnSpPr>
+          <p:cNvPr id="21" name="直線コネクタ 20">
+            <a:extLst>
+              <a:ext uri="{FF2B5EF4-FFF2-40B4-BE49-F238E27FC236}">
+                <a16:creationId xmlns:a16="http://schemas.microsoft.com/office/drawing/2014/main" id="{D6F401C3-DDED-A3A4-C5C2-B0CE991986E4}"/>
+              </a:ext>
+            </a:extLst>
+          </p:cNvPr>
+          <p:cNvCxnSpPr>
+            <a:cxnSpLocks/>
+          </p:cNvCxnSpPr>
+          <p:nvPr/>
+        </p:nvCxnSpPr>
+        <p:spPr>
+          <a:xfrm>
+            <a:off x="3156880" y="2017677"/>
+            <a:ext cx="1786932" cy="0"/>
+          </a:xfrm>
+          <a:prstGeom prst="line">
+            <a:avLst/>
+          </a:prstGeom>
+          <a:ln>
+            <a:solidFill>
+              <a:schemeClr val="tx1"/>
+            </a:solidFill>
+            <a:headEnd type="triangle"/>
+            <a:tailEnd type="triangle"/>
+          </a:ln>
+        </p:spPr>
+        <p:style>
+          <a:lnRef idx="1">
+            <a:schemeClr val="accent1"/>
+          </a:lnRef>
+          <a:fillRef idx="0">
+            <a:schemeClr val="accent1"/>
+          </a:fillRef>
+          <a:effectRef idx="0">
+            <a:schemeClr val="accent1"/>
+          </a:effectRef>
+          <a:fontRef idx="minor">
+            <a:schemeClr val="tx1"/>
+          </a:fontRef>
+        </p:style>
+      </p:cxnSp>
+      <p:sp>
+        <p:nvSpPr>
+          <p:cNvPr id="22" name="テキスト ボックス 21">
+            <a:extLst>
+              <a:ext uri="{FF2B5EF4-FFF2-40B4-BE49-F238E27FC236}">
+                <a16:creationId xmlns:a16="http://schemas.microsoft.com/office/drawing/2014/main" id="{0CA74A76-20A3-8D2D-75DE-E1D53EE2586D}"/>
+              </a:ext>
+            </a:extLst>
+          </p:cNvPr>
+          <p:cNvSpPr txBox="1"/>
+          <p:nvPr/>
+        </p:nvSpPr>
+        <p:spPr>
+          <a:xfrm>
+            <a:off x="3865644" y="1556792"/>
+            <a:ext cx="610873" cy="461665"/>
+          </a:xfrm>
+          <a:prstGeom prst="rect">
+            <a:avLst/>
+          </a:prstGeom>
+          <a:noFill/>
+        </p:spPr>
+        <p:txBody>
+          <a:bodyPr wrap="none" rtlCol="0">
+            <a:spAutoFit/>
+          </a:bodyPr>
+          <a:lstStyle/>
+          <a:p>
+            <a:r>
+              <a:rPr kumimoji="1" lang="en-US" altLang="ja-JP" sz="2400" b="1" i="1">
+                <a:latin typeface="Times New Roman" panose="02020603050405020304" pitchFamily="18" charset="0"/>
+                <a:cs typeface="Times New Roman" panose="02020603050405020304" pitchFamily="18" charset="0"/>
+              </a:rPr>
+              <a:t>ΔT</a:t>
+            </a:r>
+            <a:r>
+              <a:rPr lang="en-US" altLang="ja-JP" sz="2400" b="1" i="1" baseline="-25000">
+                <a:latin typeface="Times New Roman" panose="02020603050405020304" pitchFamily="18" charset="0"/>
+                <a:cs typeface="Times New Roman" panose="02020603050405020304" pitchFamily="18" charset="0"/>
+              </a:rPr>
+              <a:t>i</a:t>
+            </a:r>
+            <a:endParaRPr kumimoji="1" lang="ja-JP" altLang="en-US" sz="2400" baseline="-25000">
+              <a:latin typeface="Times New Roman" panose="02020603050405020304" pitchFamily="18" charset="0"/>
+              <a:cs typeface="Times New Roman" panose="02020603050405020304" pitchFamily="18" charset="0"/>
+            </a:endParaRPr>
+          </a:p>
+        </p:txBody>
+      </p:sp>
+      <p:sp>
+        <p:nvSpPr>
+          <p:cNvPr id="23" name="テキスト ボックス 22">
+            <a:extLst>
+              <a:ext uri="{FF2B5EF4-FFF2-40B4-BE49-F238E27FC236}">
+                <a16:creationId xmlns:a16="http://schemas.microsoft.com/office/drawing/2014/main" id="{4FC91F9C-7EFE-8736-F42F-618E273378D5}"/>
+              </a:ext>
+            </a:extLst>
+          </p:cNvPr>
+          <p:cNvSpPr txBox="1"/>
+          <p:nvPr/>
+        </p:nvSpPr>
+        <p:spPr>
+          <a:xfrm>
+            <a:off x="360029" y="3758409"/>
+            <a:ext cx="3010761" cy="1323439"/>
+          </a:xfrm>
+          <a:prstGeom prst="rect">
+            <a:avLst/>
+          </a:prstGeom>
+          <a:noFill/>
+        </p:spPr>
+        <p:txBody>
+          <a:bodyPr wrap="none" rtlCol="0">
+            <a:spAutoFit/>
+          </a:bodyPr>
+          <a:lstStyle/>
+          <a:p>
+            <a:r>
+              <a:rPr lang="en-US" altLang="ja-JP" sz="2400" b="1" i="1">
+                <a:latin typeface="Times New Roman" panose="02020603050405020304" pitchFamily="18" charset="0"/>
+                <a:cs typeface="Times New Roman" panose="02020603050405020304" pitchFamily="18" charset="0"/>
+              </a:rPr>
+              <a:t>T</a:t>
+            </a:r>
+            <a:r>
+              <a:rPr lang="en-US" altLang="ja-JP" sz="2400" b="1" i="1" baseline="-25000">
+                <a:latin typeface="Times New Roman" panose="02020603050405020304" pitchFamily="18" charset="0"/>
+                <a:cs typeface="Times New Roman" panose="02020603050405020304" pitchFamily="18" charset="0"/>
+              </a:rPr>
+              <a:t>i</a:t>
+            </a:r>
+            <a:r>
+              <a:rPr lang="ja-JP" altLang="en-US" sz="2400" baseline="-25000">
+                <a:latin typeface="Times New Roman" panose="02020603050405020304" pitchFamily="18" charset="0"/>
+                <a:cs typeface="Times New Roman" panose="02020603050405020304" pitchFamily="18" charset="0"/>
+              </a:rPr>
+              <a:t>　</a:t>
+            </a:r>
+            <a:r>
+              <a:rPr lang="en-US" altLang="ja-JP" sz="2400" b="1" i="1">
+                <a:latin typeface="Times New Roman" panose="02020603050405020304" pitchFamily="18" charset="0"/>
+                <a:cs typeface="Times New Roman" panose="02020603050405020304" pitchFamily="18" charset="0"/>
+              </a:rPr>
+              <a:t>in Rear </a:t>
+            </a:r>
+            <a:r>
+              <a:rPr kumimoji="1" lang="en-US" altLang="ja-JP" sz="2400" b="1" i="1">
+                <a:latin typeface="Times New Roman" panose="02020603050405020304" pitchFamily="18" charset="0"/>
+                <a:cs typeface="Times New Roman" panose="02020603050405020304" pitchFamily="18" charset="0"/>
+              </a:rPr>
+              <a:t>Dead-Zone</a:t>
+            </a:r>
+            <a:endParaRPr kumimoji="1" lang="en-US" altLang="ja-JP" sz="2400" b="1" i="1" baseline="-25000">
+              <a:latin typeface="Times New Roman" panose="02020603050405020304" pitchFamily="18" charset="0"/>
+              <a:cs typeface="Times New Roman" panose="02020603050405020304" pitchFamily="18" charset="0"/>
+            </a:endParaRPr>
+          </a:p>
+          <a:p>
+            <a:endParaRPr lang="en-US" altLang="ja-JP" sz="2400" b="1" i="1" baseline="-25000">
+              <a:latin typeface="Times New Roman" panose="02020603050405020304" pitchFamily="18" charset="0"/>
+              <a:cs typeface="Times New Roman" panose="02020603050405020304" pitchFamily="18" charset="0"/>
+            </a:endParaRPr>
+          </a:p>
+          <a:p>
+            <a:endParaRPr lang="en-US" altLang="ja-JP" sz="2400" b="1" i="1" baseline="-25000">
+              <a:latin typeface="Times New Roman" panose="02020603050405020304" pitchFamily="18" charset="0"/>
+              <a:cs typeface="Times New Roman" panose="02020603050405020304" pitchFamily="18" charset="0"/>
+            </a:endParaRPr>
+          </a:p>
+          <a:p>
+            <a:r>
+              <a:rPr kumimoji="1" lang="en-US" altLang="ja-JP" sz="2400" b="1" i="1">
+                <a:latin typeface="Times New Roman" panose="02020603050405020304" pitchFamily="18" charset="0"/>
+                <a:cs typeface="Times New Roman" panose="02020603050405020304" pitchFamily="18" charset="0"/>
+              </a:rPr>
+              <a:t>is behind </a:t>
+            </a:r>
+            <a:r>
+              <a:rPr lang="en-US" altLang="ja-JP" sz="2400" b="1" i="1">
+                <a:latin typeface="Times New Roman" panose="02020603050405020304" pitchFamily="18" charset="0"/>
+                <a:cs typeface="Times New Roman" panose="02020603050405020304" pitchFamily="18" charset="0"/>
+              </a:rPr>
+              <a:t>T</a:t>
+            </a:r>
+            <a:r>
+              <a:rPr lang="en-US" altLang="ja-JP" sz="2400" b="1" i="1" baseline="-25000">
+                <a:latin typeface="Times New Roman" panose="02020603050405020304" pitchFamily="18" charset="0"/>
+                <a:cs typeface="Times New Roman" panose="02020603050405020304" pitchFamily="18" charset="0"/>
+              </a:rPr>
+              <a:t>c </a:t>
+            </a:r>
+            <a:r>
+              <a:rPr kumimoji="1" lang="en-US" altLang="ja-JP" sz="2400" b="1" i="1">
+                <a:latin typeface="Times New Roman" panose="02020603050405020304" pitchFamily="18" charset="0"/>
+                <a:cs typeface="Times New Roman" panose="02020603050405020304" pitchFamily="18" charset="0"/>
+              </a:rPr>
+              <a:t>and stall.</a:t>
+            </a:r>
+          </a:p>
+        </p:txBody>
+      </p:sp>
+      <p:cxnSp>
+        <p:nvCxnSpPr>
+          <p:cNvPr id="25" name="直線矢印コネクタ 24">
+            <a:extLst>
+              <a:ext uri="{FF2B5EF4-FFF2-40B4-BE49-F238E27FC236}">
+                <a16:creationId xmlns:a16="http://schemas.microsoft.com/office/drawing/2014/main" id="{B19108D7-D21B-D64B-3318-D0EE743DFE20}"/>
+              </a:ext>
+            </a:extLst>
+          </p:cNvPr>
+          <p:cNvCxnSpPr>
+            <a:cxnSpLocks/>
+            <a:stCxn id="116" idx="1"/>
+            <a:endCxn id="23" idx="0"/>
+          </p:cNvCxnSpPr>
+          <p:nvPr/>
+        </p:nvCxnSpPr>
+        <p:spPr>
+          <a:xfrm flipH="1">
+            <a:off x="1865410" y="2427816"/>
+            <a:ext cx="1283665" cy="1330593"/>
+          </a:xfrm>
+          <a:prstGeom prst="straightConnector1">
+            <a:avLst/>
+          </a:prstGeom>
+          <a:ln>
+            <a:solidFill>
+              <a:schemeClr val="bg1">
+                <a:lumMod val="50000"/>
+              </a:schemeClr>
+            </a:solidFill>
+            <a:prstDash val="dash"/>
+            <a:headEnd type="none"/>
+            <a:tailEnd type="none"/>
+          </a:ln>
+        </p:spPr>
+        <p:style>
+          <a:lnRef idx="1">
+            <a:schemeClr val="accent1"/>
+          </a:lnRef>
+          <a:fillRef idx="0">
+            <a:schemeClr val="accent1"/>
+          </a:fillRef>
+          <a:effectRef idx="0">
+            <a:schemeClr val="accent1"/>
+          </a:effectRef>
+          <a:fontRef idx="minor">
+            <a:schemeClr val="tx1"/>
+          </a:fontRef>
+        </p:style>
+      </p:cxnSp>
+      <p:pic>
+        <p:nvPicPr>
+          <p:cNvPr id="29" name="図 28">
+            <a:extLst>
+              <a:ext uri="{FF2B5EF4-FFF2-40B4-BE49-F238E27FC236}">
+                <a16:creationId xmlns:a16="http://schemas.microsoft.com/office/drawing/2014/main" id="{AF4A8A68-55E9-FA4F-AFA1-C19B9936E6A1}"/>
+              </a:ext>
+            </a:extLst>
+          </p:cNvPr>
+          <p:cNvPicPr>
+            <a:picLocks noChangeAspect="1"/>
+          </p:cNvPicPr>
+          <p:nvPr/>
+        </p:nvPicPr>
+        <p:blipFill>
+          <a:blip r:embed="rId2"/>
+          <a:stretch>
+            <a:fillRect/>
+          </a:stretch>
+        </p:blipFill>
+        <p:spPr>
+          <a:xfrm>
+            <a:off x="843375" y="4254589"/>
+            <a:ext cx="2391282" cy="398547"/>
+          </a:xfrm>
+          <a:prstGeom prst="rect">
+            <a:avLst/>
+          </a:prstGeom>
+        </p:spPr>
+      </p:pic>
+      <p:sp>
+        <p:nvSpPr>
+          <p:cNvPr id="33" name="テキスト ボックス 32">
+            <a:extLst>
+              <a:ext uri="{FF2B5EF4-FFF2-40B4-BE49-F238E27FC236}">
+                <a16:creationId xmlns:a16="http://schemas.microsoft.com/office/drawing/2014/main" id="{009F55F4-BDCC-B4E3-E6DE-BF86F48CCD49}"/>
+              </a:ext>
+            </a:extLst>
+          </p:cNvPr>
+          <p:cNvSpPr txBox="1"/>
+          <p:nvPr/>
+        </p:nvSpPr>
+        <p:spPr>
+          <a:xfrm>
+            <a:off x="7343434" y="2847603"/>
+            <a:ext cx="3193503" cy="1938992"/>
+          </a:xfrm>
+          <a:prstGeom prst="rect">
+            <a:avLst/>
+          </a:prstGeom>
+          <a:noFill/>
+        </p:spPr>
+        <p:txBody>
+          <a:bodyPr wrap="none" rtlCol="0">
+            <a:spAutoFit/>
+          </a:bodyPr>
+          <a:lstStyle/>
+          <a:p>
+            <a:r>
+              <a:rPr lang="en-US" altLang="ja-JP" sz="2400" b="1" i="1">
+                <a:latin typeface="Times New Roman" panose="02020603050405020304" pitchFamily="18" charset="0"/>
+                <a:cs typeface="Times New Roman" panose="02020603050405020304" pitchFamily="18" charset="0"/>
+              </a:rPr>
+              <a:t>General Safe Condition</a:t>
+            </a:r>
+          </a:p>
+          <a:p>
+            <a:endParaRPr lang="en-US" altLang="ja-JP" sz="2400" b="1" i="1">
+              <a:latin typeface="Times New Roman" panose="02020603050405020304" pitchFamily="18" charset="0"/>
+              <a:cs typeface="Times New Roman" panose="02020603050405020304" pitchFamily="18" charset="0"/>
+            </a:endParaRPr>
+          </a:p>
+          <a:p>
+            <a:endParaRPr lang="en-US" altLang="ja-JP" sz="2400" b="1" i="1">
+              <a:latin typeface="Times New Roman" panose="02020603050405020304" pitchFamily="18" charset="0"/>
+              <a:cs typeface="Times New Roman" panose="02020603050405020304" pitchFamily="18" charset="0"/>
+            </a:endParaRPr>
+          </a:p>
+          <a:p>
+            <a:r>
+              <a:rPr lang="en-US" altLang="ja-JP" sz="2400" b="1" i="1">
+                <a:latin typeface="Times New Roman" panose="02020603050405020304" pitchFamily="18" charset="0"/>
+                <a:cs typeface="Times New Roman" panose="02020603050405020304" pitchFamily="18" charset="0"/>
+              </a:rPr>
+              <a:t>removes the two </a:t>
+            </a:r>
+          </a:p>
+          <a:p>
+            <a:r>
+              <a:rPr lang="en-US" altLang="ja-JP" sz="2400" b="1" i="1">
+                <a:latin typeface="Times New Roman" panose="02020603050405020304" pitchFamily="18" charset="0"/>
+                <a:cs typeface="Times New Roman" panose="02020603050405020304" pitchFamily="18" charset="0"/>
+              </a:rPr>
+              <a:t>overshoots at </a:t>
+            </a:r>
+            <a:r>
+              <a:rPr lang="ja-JP" altLang="en-US" sz="2400">
+                <a:latin typeface="Times New Roman" panose="02020603050405020304" pitchFamily="18" charset="0"/>
+                <a:cs typeface="Times New Roman" panose="02020603050405020304" pitchFamily="18" charset="0"/>
+              </a:rPr>
+              <a:t>✖️</a:t>
+            </a:r>
+            <a:r>
+              <a:rPr lang="en-US" altLang="ja-JP" sz="2400">
+                <a:latin typeface="Times New Roman" panose="02020603050405020304" pitchFamily="18" charset="0"/>
+                <a:cs typeface="Times New Roman" panose="02020603050405020304" pitchFamily="18" charset="0"/>
+              </a:rPr>
+              <a:t> .</a:t>
+            </a:r>
+            <a:endParaRPr kumimoji="1" lang="ja-JP" altLang="en-US" sz="2400" baseline="-25000">
+              <a:latin typeface="Times New Roman" panose="02020603050405020304" pitchFamily="18" charset="0"/>
+              <a:cs typeface="Times New Roman" panose="02020603050405020304" pitchFamily="18" charset="0"/>
+            </a:endParaRPr>
+          </a:p>
+        </p:txBody>
+      </p:sp>
+      <p:pic>
+        <p:nvPicPr>
+          <p:cNvPr id="39" name="図 38">
+            <a:extLst>
+              <a:ext uri="{FF2B5EF4-FFF2-40B4-BE49-F238E27FC236}">
+                <a16:creationId xmlns:a16="http://schemas.microsoft.com/office/drawing/2014/main" id="{372C73BB-1D01-90B2-1B6F-9373ADA2BBAC}"/>
+              </a:ext>
+            </a:extLst>
+          </p:cNvPr>
+          <p:cNvPicPr>
+            <a:picLocks noChangeAspect="1"/>
+          </p:cNvPicPr>
+          <p:nvPr/>
+        </p:nvPicPr>
+        <p:blipFill>
+          <a:blip r:embed="rId3"/>
+          <a:stretch>
+            <a:fillRect/>
+          </a:stretch>
+        </p:blipFill>
+        <p:spPr>
+          <a:xfrm>
+            <a:off x="7401197" y="3499626"/>
+            <a:ext cx="3258864" cy="476014"/>
+          </a:xfrm>
+          <a:prstGeom prst="rect">
+            <a:avLst/>
+          </a:prstGeom>
+        </p:spPr>
+      </p:pic>
+      <p:cxnSp>
+        <p:nvCxnSpPr>
+          <p:cNvPr id="40" name="直線矢印コネクタ 39">
+            <a:extLst>
+              <a:ext uri="{FF2B5EF4-FFF2-40B4-BE49-F238E27FC236}">
+                <a16:creationId xmlns:a16="http://schemas.microsoft.com/office/drawing/2014/main" id="{0113C35C-E318-849E-E253-1E8B3F64EF2C}"/>
+              </a:ext>
+            </a:extLst>
+          </p:cNvPr>
+          <p:cNvCxnSpPr>
+            <a:cxnSpLocks/>
+            <a:stCxn id="14" idx="3"/>
+            <a:endCxn id="33" idx="1"/>
+          </p:cNvCxnSpPr>
+          <p:nvPr/>
+        </p:nvCxnSpPr>
+        <p:spPr>
+          <a:xfrm>
+            <a:off x="5351509" y="3510651"/>
+            <a:ext cx="1991925" cy="306448"/>
+          </a:xfrm>
+          <a:prstGeom prst="straightConnector1">
+            <a:avLst/>
+          </a:prstGeom>
+          <a:ln>
+            <a:solidFill>
+              <a:schemeClr val="bg1">
+                <a:lumMod val="50000"/>
+              </a:schemeClr>
+            </a:solidFill>
+            <a:prstDash val="dash"/>
+            <a:headEnd type="none"/>
+            <a:tailEnd type="none"/>
+          </a:ln>
+        </p:spPr>
+        <p:style>
+          <a:lnRef idx="1">
+            <a:schemeClr val="accent1"/>
+          </a:lnRef>
+          <a:fillRef idx="0">
+            <a:schemeClr val="accent1"/>
+          </a:fillRef>
+          <a:effectRef idx="0">
+            <a:schemeClr val="accent1"/>
+          </a:effectRef>
+          <a:fontRef idx="minor">
+            <a:schemeClr val="tx1"/>
+          </a:fontRef>
+        </p:style>
+      </p:cxnSp>
+      <p:cxnSp>
+        <p:nvCxnSpPr>
+          <p:cNvPr id="43" name="直線矢印コネクタ 42">
+            <a:extLst>
+              <a:ext uri="{FF2B5EF4-FFF2-40B4-BE49-F238E27FC236}">
+                <a16:creationId xmlns:a16="http://schemas.microsoft.com/office/drawing/2014/main" id="{26475AC2-6BED-5503-0A28-6EE3051B6B1F}"/>
+              </a:ext>
+            </a:extLst>
+          </p:cNvPr>
+          <p:cNvCxnSpPr>
+            <a:cxnSpLocks/>
+            <a:stCxn id="19" idx="0"/>
+            <a:endCxn id="33" idx="1"/>
+          </p:cNvCxnSpPr>
+          <p:nvPr/>
+        </p:nvCxnSpPr>
+        <p:spPr>
+          <a:xfrm flipV="1">
+            <a:off x="6693547" y="3817099"/>
+            <a:ext cx="649887" cy="135502"/>
+          </a:xfrm>
+          <a:prstGeom prst="straightConnector1">
+            <a:avLst/>
+          </a:prstGeom>
+          <a:ln>
+            <a:solidFill>
+              <a:schemeClr val="bg1">
+                <a:lumMod val="50000"/>
+              </a:schemeClr>
+            </a:solidFill>
+            <a:prstDash val="dash"/>
+            <a:headEnd type="none"/>
+            <a:tailEnd type="none"/>
+          </a:ln>
+        </p:spPr>
+        <p:style>
+          <a:lnRef idx="1">
+            <a:schemeClr val="accent1"/>
+          </a:lnRef>
+          <a:fillRef idx="0">
+            <a:schemeClr val="accent1"/>
+          </a:fillRef>
+          <a:effectRef idx="0">
+            <a:schemeClr val="accent1"/>
+          </a:effectRef>
+          <a:fontRef idx="minor">
+            <a:schemeClr val="tx1"/>
+          </a:fontRef>
+        </p:style>
+      </p:cxnSp>
+    </p:spTree>
+    <p:extLst>
+      <p:ext uri="{BB962C8B-B14F-4D97-AF65-F5344CB8AC3E}">
+        <p14:creationId xmlns:p14="http://schemas.microsoft.com/office/powerpoint/2010/main" val="2000267609"/>
+      </p:ext>
+    </p:extLst>
+  </p:cSld>
+  <p:clrMapOvr>
+    <a:masterClrMapping/>
+  </p:clrMapOvr>
+</p:sld>
+</file>
+
+<file path=ppt/slides/slide15.xml><?xml version="1.0" encoding="utf-8"?>
+<p:sld xmlns:a="http://schemas.openxmlformats.org/drawingml/2006/main" xmlns:r="http://schemas.openxmlformats.org/officeDocument/2006/relationships" xmlns:p="http://schemas.openxmlformats.org/presentationml/2006/main">
+  <p:cSld>
+    <p:spTree>
+      <p:nvGrpSpPr>
         <p:cNvPr id="1" name="">
           <a:extLst>
             <a:ext uri="{FF2B5EF4-FFF2-40B4-BE49-F238E27FC236}">
@@ -12041,7 +13893,7 @@
               <a:pPr algn="r">
                 <a:defRPr/>
               </a:pPr>
-              <a:t>13</a:t>
+              <a:t>15</a:t>
             </a:fld>
             <a:endParaRPr lang="ja-JP" altLang="en-US" dirty="0"/>
           </a:p>
@@ -14963,7 +16815,7 @@
 </p:sld>
 </file>
 
-<file path=ppt/slides/slide14.xml><?xml version="1.0" encoding="utf-8"?>
+<file path=ppt/slides/slide16.xml><?xml version="1.0" encoding="utf-8"?>
 <p:sld xmlns:a="http://schemas.openxmlformats.org/drawingml/2006/main" xmlns:r="http://schemas.openxmlformats.org/officeDocument/2006/relationships" xmlns:p="http://schemas.openxmlformats.org/presentationml/2006/main">
   <p:cSld>
     <p:spTree>
@@ -15051,7 +16903,7 @@
               <a:pPr algn="r">
                 <a:defRPr/>
               </a:pPr>
-              <a:t>14</a:t>
+              <a:t>16</a:t>
             </a:fld>
             <a:endParaRPr lang="ja-JP" altLang="en-US" sz="2800" dirty="0">
               <a:latin typeface="Meiryo UI" panose="020B0604030504040204" pitchFamily="34" charset="-128"/>
@@ -16144,7 +17996,7 @@
 </p:sld>
 </file>
 
-<file path=ppt/slides/slide15.xml><?xml version="1.0" encoding="utf-8"?>
+<file path=ppt/slides/slide17.xml><?xml version="1.0" encoding="utf-8"?>
 <p:sld xmlns:a="http://schemas.openxmlformats.org/drawingml/2006/main" xmlns:r="http://schemas.openxmlformats.org/officeDocument/2006/relationships" xmlns:p="http://schemas.openxmlformats.org/presentationml/2006/main">
   <p:cSld>
     <p:spTree>
@@ -16234,7 +18086,7 @@
               <a:pPr algn="r">
                 <a:defRPr/>
               </a:pPr>
-              <a:t>15</a:t>
+              <a:t>17</a:t>
             </a:fld>
             <a:endParaRPr lang="ja-JP" altLang="en-US" sz="2800" dirty="0">
               <a:latin typeface="Meiryo UI" panose="020B0604030504040204" pitchFamily="34" charset="-128"/>
@@ -16382,7 +18234,7 @@
 </p:sld>
 </file>
 
-<file path=ppt/slides/slide16.xml><?xml version="1.0" encoding="utf-8"?>
+<file path=ppt/slides/slide18.xml><?xml version="1.0" encoding="utf-8"?>
 <p:sld xmlns:a="http://schemas.openxmlformats.org/drawingml/2006/main" xmlns:r="http://schemas.openxmlformats.org/officeDocument/2006/relationships" xmlns:p="http://schemas.openxmlformats.org/presentationml/2006/main">
   <p:cSld>
     <p:spTree>
@@ -16467,7 +18319,7 @@
               <a:pPr algn="r">
                 <a:defRPr/>
               </a:pPr>
-              <a:t>16</a:t>
+              <a:t>18</a:t>
             </a:fld>
             <a:endParaRPr lang="ja-JP" altLang="en-US" sz="2800" dirty="0">
               <a:latin typeface="Meiryo UI" panose="020B0604030504040204" pitchFamily="34" charset="-128"/>

--- a/src/math/Hakoniwa-time.pptx
+++ b/src/math/Hakoniwa-time.pptx
@@ -6,7 +6,7 @@
     <p:sldMasterId id="2147483815" r:id="rId2"/>
   </p:sldMasterIdLst>
   <p:notesMasterIdLst>
-    <p:notesMasterId r:id="rId21"/>
+    <p:notesMasterId r:id="rId22"/>
   </p:notesMasterIdLst>
   <p:sldIdLst>
     <p:sldId id="256" r:id="rId3"/>
@@ -23,10 +23,11 @@
     <p:sldId id="1359" r:id="rId14"/>
     <p:sldId id="1360" r:id="rId15"/>
     <p:sldId id="1361" r:id="rId16"/>
-    <p:sldId id="1355" r:id="rId17"/>
-    <p:sldId id="1350" r:id="rId18"/>
-    <p:sldId id="1358" r:id="rId19"/>
-    <p:sldId id="1356" r:id="rId20"/>
+    <p:sldId id="1362" r:id="rId17"/>
+    <p:sldId id="1355" r:id="rId18"/>
+    <p:sldId id="1350" r:id="rId19"/>
+    <p:sldId id="1358" r:id="rId20"/>
+    <p:sldId id="1356" r:id="rId21"/>
   </p:sldIdLst>
   <p:sldSz cx="12192000" cy="6858000"/>
   <p:notesSz cx="6797675" cy="9926638"/>
@@ -13813,6 +13814,267 @@
   <p:cSld>
     <p:spTree>
       <p:nvGrpSpPr>
+        <p:cNvPr id="1" name=""/>
+        <p:cNvGrpSpPr/>
+        <p:nvPr/>
+      </p:nvGrpSpPr>
+      <p:grpSpPr>
+        <a:xfrm>
+          <a:off x="0" y="0"/>
+          <a:ext cx="0" cy="0"/>
+          <a:chOff x="0" y="0"/>
+          <a:chExt cx="0" cy="0"/>
+        </a:xfrm>
+      </p:grpSpPr>
+      <p:sp>
+        <p:nvSpPr>
+          <p:cNvPr id="2" name="スライド番号プレースホルダー 1">
+            <a:extLst>
+              <a:ext uri="{FF2B5EF4-FFF2-40B4-BE49-F238E27FC236}">
+                <a16:creationId xmlns:a16="http://schemas.microsoft.com/office/drawing/2014/main" id="{10010F59-5D1D-2C83-534A-3B66FCF1E27A}"/>
+              </a:ext>
+            </a:extLst>
+          </p:cNvPr>
+          <p:cNvSpPr>
+            <a:spLocks noGrp="1"/>
+          </p:cNvSpPr>
+          <p:nvPr>
+            <p:ph type="sldNum" sz="quarter" idx="4"/>
+          </p:nvPr>
+        </p:nvSpPr>
+        <p:spPr/>
+        <p:txBody>
+          <a:bodyPr/>
+          <a:lstStyle/>
+          <a:p>
+            <a:pPr algn="r">
+              <a:defRPr/>
+            </a:pPr>
+            <a:fld id="{E17FD244-5B26-4792-B537-EF0BE56E30E9}" type="slidenum">
+              <a:rPr lang="ja-JP" altLang="en-US" smtClean="0"/>
+              <a:pPr algn="r">
+                <a:defRPr/>
+              </a:pPr>
+              <a:t>15</a:t>
+            </a:fld>
+            <a:endParaRPr lang="ja-JP" altLang="en-US" dirty="0"/>
+          </a:p>
+        </p:txBody>
+      </p:sp>
+      <p:pic>
+        <p:nvPicPr>
+          <p:cNvPr id="4" name="図 3" descr="グラフ が含まれている画像&#10;&#10;AI 生成コンテンツは誤りを含む可能性があります。">
+            <a:extLst>
+              <a:ext uri="{FF2B5EF4-FFF2-40B4-BE49-F238E27FC236}">
+                <a16:creationId xmlns:a16="http://schemas.microsoft.com/office/drawing/2014/main" id="{E67D6C25-731D-8761-2D75-0FB5D2ED1406}"/>
+              </a:ext>
+            </a:extLst>
+          </p:cNvPr>
+          <p:cNvPicPr>
+            <a:picLocks noChangeAspect="1"/>
+          </p:cNvPicPr>
+          <p:nvPr/>
+        </p:nvPicPr>
+        <p:blipFill>
+          <a:blip r:embed="rId2">
+            <a:extLst>
+              <a:ext uri="{28A0092B-C50C-407E-A947-70E740481C1C}">
+                <a14:useLocalDpi xmlns:a14="http://schemas.microsoft.com/office/drawing/2010/main" val="0"/>
+              </a:ext>
+            </a:extLst>
+          </a:blip>
+          <a:stretch>
+            <a:fillRect/>
+          </a:stretch>
+        </p:blipFill>
+        <p:spPr>
+          <a:xfrm>
+            <a:off x="4063614" y="1916832"/>
+            <a:ext cx="3775956" cy="2517304"/>
+          </a:xfrm>
+          <a:prstGeom prst="rect">
+            <a:avLst/>
+          </a:prstGeom>
+        </p:spPr>
+      </p:pic>
+      <p:pic>
+        <p:nvPicPr>
+          <p:cNvPr id="6" name="図 5" descr="グラフ&#10;&#10;AI 生成コンテンツは誤りを含む可能性があります。">
+            <a:extLst>
+              <a:ext uri="{FF2B5EF4-FFF2-40B4-BE49-F238E27FC236}">
+                <a16:creationId xmlns:a16="http://schemas.microsoft.com/office/drawing/2014/main" id="{D5A9DC6E-B9FF-7B07-BE97-7A8CCB59B56D}"/>
+              </a:ext>
+            </a:extLst>
+          </p:cNvPr>
+          <p:cNvPicPr>
+            <a:picLocks noChangeAspect="1"/>
+          </p:cNvPicPr>
+          <p:nvPr/>
+        </p:nvPicPr>
+        <p:blipFill>
+          <a:blip r:embed="rId3">
+            <a:extLst>
+              <a:ext uri="{28A0092B-C50C-407E-A947-70E740481C1C}">
+                <a14:useLocalDpi xmlns:a14="http://schemas.microsoft.com/office/drawing/2010/main" val="0"/>
+              </a:ext>
+            </a:extLst>
+          </a:blip>
+          <a:stretch>
+            <a:fillRect/>
+          </a:stretch>
+        </p:blipFill>
+        <p:spPr>
+          <a:xfrm>
+            <a:off x="7811638" y="1919028"/>
+            <a:ext cx="3775956" cy="2517304"/>
+          </a:xfrm>
+          <a:prstGeom prst="rect">
+            <a:avLst/>
+          </a:prstGeom>
+        </p:spPr>
+      </p:pic>
+      <p:pic>
+        <p:nvPicPr>
+          <p:cNvPr id="8" name="図 7" descr="グラフ が含まれている画像&#10;&#10;AI 生成コンテンツは誤りを含む可能性があります。">
+            <a:extLst>
+              <a:ext uri="{FF2B5EF4-FFF2-40B4-BE49-F238E27FC236}">
+                <a16:creationId xmlns:a16="http://schemas.microsoft.com/office/drawing/2014/main" id="{AF452E51-9CD8-AC55-1223-76A133F29FC5}"/>
+              </a:ext>
+            </a:extLst>
+          </p:cNvPr>
+          <p:cNvPicPr>
+            <a:picLocks noChangeAspect="1"/>
+          </p:cNvPicPr>
+          <p:nvPr/>
+        </p:nvPicPr>
+        <p:blipFill>
+          <a:blip r:embed="rId4">
+            <a:extLst>
+              <a:ext uri="{28A0092B-C50C-407E-A947-70E740481C1C}">
+                <a14:useLocalDpi xmlns:a14="http://schemas.microsoft.com/office/drawing/2010/main" val="0"/>
+              </a:ext>
+            </a:extLst>
+          </a:blip>
+          <a:stretch>
+            <a:fillRect/>
+          </a:stretch>
+        </p:blipFill>
+        <p:spPr>
+          <a:xfrm>
+            <a:off x="314703" y="1931374"/>
+            <a:ext cx="3775956" cy="2517304"/>
+          </a:xfrm>
+          <a:prstGeom prst="rect">
+            <a:avLst/>
+          </a:prstGeom>
+        </p:spPr>
+      </p:pic>
+      <p:sp>
+        <p:nvSpPr>
+          <p:cNvPr id="9" name="円/楕円 8">
+            <a:extLst>
+              <a:ext uri="{FF2B5EF4-FFF2-40B4-BE49-F238E27FC236}">
+                <a16:creationId xmlns:a16="http://schemas.microsoft.com/office/drawing/2014/main" id="{6496BB5D-1A4B-ABD1-CAEB-F31AF309A2F3}"/>
+              </a:ext>
+            </a:extLst>
+          </p:cNvPr>
+          <p:cNvSpPr/>
+          <p:nvPr/>
+        </p:nvSpPr>
+        <p:spPr>
+          <a:xfrm>
+            <a:off x="8904312" y="3861048"/>
+            <a:ext cx="445661" cy="443614"/>
+          </a:xfrm>
+          <a:prstGeom prst="ellipse">
+            <a:avLst/>
+          </a:prstGeom>
+          <a:noFill/>
+          <a:ln>
+            <a:solidFill>
+              <a:schemeClr val="tx1"/>
+            </a:solidFill>
+          </a:ln>
+        </p:spPr>
+        <p:style>
+          <a:lnRef idx="2">
+            <a:schemeClr val="accent1">
+              <a:shade val="15000"/>
+            </a:schemeClr>
+          </a:lnRef>
+          <a:fillRef idx="1">
+            <a:schemeClr val="accent1"/>
+          </a:fillRef>
+          <a:effectRef idx="0">
+            <a:schemeClr val="accent1"/>
+          </a:effectRef>
+          <a:fontRef idx="minor">
+            <a:schemeClr val="lt1"/>
+          </a:fontRef>
+        </p:style>
+        <p:txBody>
+          <a:bodyPr rtlCol="0" anchor="ctr"/>
+          <a:lstStyle/>
+          <a:p>
+            <a:pPr algn="ctr"/>
+            <a:endParaRPr kumimoji="1" lang="ja-JP" altLang="en-US"/>
+          </a:p>
+        </p:txBody>
+      </p:sp>
+      <p:sp>
+        <p:nvSpPr>
+          <p:cNvPr id="10" name="テキスト ボックス 9">
+            <a:extLst>
+              <a:ext uri="{FF2B5EF4-FFF2-40B4-BE49-F238E27FC236}">
+                <a16:creationId xmlns:a16="http://schemas.microsoft.com/office/drawing/2014/main" id="{C5C9FA7A-8090-1484-D33B-D70A64C77A75}"/>
+              </a:ext>
+            </a:extLst>
+          </p:cNvPr>
+          <p:cNvSpPr txBox="1"/>
+          <p:nvPr/>
+        </p:nvSpPr>
+        <p:spPr>
+          <a:xfrm>
+            <a:off x="8544272" y="4304662"/>
+            <a:ext cx="1107996" cy="369332"/>
+          </a:xfrm>
+          <a:prstGeom prst="rect">
+            <a:avLst/>
+          </a:prstGeom>
+          <a:noFill/>
+        </p:spPr>
+        <p:txBody>
+          <a:bodyPr wrap="none" rtlCol="0">
+            <a:spAutoFit/>
+          </a:bodyPr>
+          <a:lstStyle/>
+          <a:p>
+            <a:r>
+              <a:rPr kumimoji="1" lang="en-US" altLang="ja-JP"/>
+              <a:t>deadlock</a:t>
+            </a:r>
+            <a:endParaRPr kumimoji="1" lang="ja-JP" altLang="en-US"/>
+          </a:p>
+        </p:txBody>
+      </p:sp>
+    </p:spTree>
+    <p:extLst>
+      <p:ext uri="{BB962C8B-B14F-4D97-AF65-F5344CB8AC3E}">
+        <p14:creationId xmlns:p14="http://schemas.microsoft.com/office/powerpoint/2010/main" val="1252602906"/>
+      </p:ext>
+    </p:extLst>
+  </p:cSld>
+  <p:clrMapOvr>
+    <a:masterClrMapping/>
+  </p:clrMapOvr>
+</p:sld>
+</file>
+
+<file path=ppt/slides/slide16.xml><?xml version="1.0" encoding="utf-8"?>
+<p:sld xmlns:a="http://schemas.openxmlformats.org/drawingml/2006/main" xmlns:r="http://schemas.openxmlformats.org/officeDocument/2006/relationships" xmlns:p="http://schemas.openxmlformats.org/presentationml/2006/main">
+  <p:cSld>
+    <p:spTree>
+      <p:nvGrpSpPr>
         <p:cNvPr id="1" name="">
           <a:extLst>
             <a:ext uri="{FF2B5EF4-FFF2-40B4-BE49-F238E27FC236}">
@@ -13893,7 +14155,7 @@
               <a:pPr algn="r">
                 <a:defRPr/>
               </a:pPr>
-              <a:t>15</a:t>
+              <a:t>16</a:t>
             </a:fld>
             <a:endParaRPr lang="ja-JP" altLang="en-US" dirty="0"/>
           </a:p>
@@ -16815,7 +17077,7 @@
 </p:sld>
 </file>
 
-<file path=ppt/slides/slide16.xml><?xml version="1.0" encoding="utf-8"?>
+<file path=ppt/slides/slide17.xml><?xml version="1.0" encoding="utf-8"?>
 <p:sld xmlns:a="http://schemas.openxmlformats.org/drawingml/2006/main" xmlns:r="http://schemas.openxmlformats.org/officeDocument/2006/relationships" xmlns:p="http://schemas.openxmlformats.org/presentationml/2006/main">
   <p:cSld>
     <p:spTree>
@@ -16903,7 +17165,7 @@
               <a:pPr algn="r">
                 <a:defRPr/>
               </a:pPr>
-              <a:t>16</a:t>
+              <a:t>17</a:t>
             </a:fld>
             <a:endParaRPr lang="ja-JP" altLang="en-US" sz="2800" dirty="0">
               <a:latin typeface="Meiryo UI" panose="020B0604030504040204" pitchFamily="34" charset="-128"/>
@@ -17996,7 +18258,7 @@
 </p:sld>
 </file>
 
-<file path=ppt/slides/slide17.xml><?xml version="1.0" encoding="utf-8"?>
+<file path=ppt/slides/slide18.xml><?xml version="1.0" encoding="utf-8"?>
 <p:sld xmlns:a="http://schemas.openxmlformats.org/drawingml/2006/main" xmlns:r="http://schemas.openxmlformats.org/officeDocument/2006/relationships" xmlns:p="http://schemas.openxmlformats.org/presentationml/2006/main">
   <p:cSld>
     <p:spTree>
@@ -18086,7 +18348,7 @@
               <a:pPr algn="r">
                 <a:defRPr/>
               </a:pPr>
-              <a:t>17</a:t>
+              <a:t>18</a:t>
             </a:fld>
             <a:endParaRPr lang="ja-JP" altLang="en-US" sz="2800" dirty="0">
               <a:latin typeface="Meiryo UI" panose="020B0604030504040204" pitchFamily="34" charset="-128"/>
@@ -18234,7 +18496,7 @@
 </p:sld>
 </file>
 
-<file path=ppt/slides/slide18.xml><?xml version="1.0" encoding="utf-8"?>
+<file path=ppt/slides/slide19.xml><?xml version="1.0" encoding="utf-8"?>
 <p:sld xmlns:a="http://schemas.openxmlformats.org/drawingml/2006/main" xmlns:r="http://schemas.openxmlformats.org/officeDocument/2006/relationships" xmlns:p="http://schemas.openxmlformats.org/presentationml/2006/main">
   <p:cSld>
     <p:spTree>
@@ -18319,7 +18581,7 @@
               <a:pPr algn="r">
                 <a:defRPr/>
               </a:pPr>
-              <a:t>18</a:t>
+              <a:t>19</a:t>
             </a:fld>
             <a:endParaRPr lang="ja-JP" altLang="en-US" sz="2800" dirty="0">
               <a:latin typeface="Meiryo UI" panose="020B0604030504040204" pitchFamily="34" charset="-128"/>
